--- a/Course_Content/Session_1/02_What_Is_Claude.pptx
+++ b/Course_Content/Session_1/02_What_Is_Claude.pptx
@@ -13,12 +13,12 @@
     <p:sldId id="258" r:id="rId4"/>
     <p:sldId id="259" r:id="rId5"/>
     <p:sldId id="260" r:id="rId6"/>
-    <p:sldId id="261" r:id="rId7"/>
-    <p:sldId id="262" r:id="rId8"/>
-    <p:sldId id="263" r:id="rId9"/>
-    <p:sldId id="264" r:id="rId10"/>
-    <p:sldId id="265" r:id="rId11"/>
-    <p:sldId id="266" r:id="rId12"/>
+    <p:sldId id="264" r:id="rId7"/>
+    <p:sldId id="261" r:id="rId8"/>
+    <p:sldId id="265" r:id="rId9"/>
+    <p:sldId id="266" r:id="rId10"/>
+    <p:sldId id="262" r:id="rId11"/>
+    <p:sldId id="263" r:id="rId12"/>
     <p:sldId id="267" r:id="rId13"/>
     <p:sldId id="268" r:id="rId14"/>
   </p:sldIdLst>
@@ -1859,7 +1859,7 @@
 
 <file path=ppt/slides/slide10.xml><?xml version="1.0" encoding="utf-8"?>
 <p:sld xmlns:a="http://schemas.openxmlformats.org/drawingml/2006/main" xmlns:r="http://schemas.openxmlformats.org/officeDocument/2006/relationships" xmlns:p="http://schemas.openxmlformats.org/presentationml/2006/main">
-  <p:cSld name="Slide 10">
+  <p:cSld name="Slide 7">
     <p:bg>
       <p:bgPr>
         <a:solidFill>
@@ -1934,7 +1934,7 @@
               <a:buNone/>
             </a:pPr>
             <a:r>
-              <a:rPr lang="en-US" sz="2800" b="1" dirty="0">
+              <a:rPr lang="en-US" sz="2600" b="1" dirty="0">
                 <a:solidFill>
                   <a:srgbClr val="FFFFFF"/>
                 </a:solidFill>
@@ -1942,9 +1942,9 @@
                 <a:ea typeface="Trebuchet MS" pitchFamily="34" charset="-122"/>
                 <a:cs typeface="Trebuchet MS" pitchFamily="34" charset="-120"/>
               </a:rPr>
-              <a:t>Extended Thinking</a:t>
-            </a:r>
-            <a:endParaRPr lang="en-US" sz="2800" dirty="0"/>
+              <a:t>CLAUDE.md — Your Highest-Leverage File</a:t>
+            </a:r>
+            <a:endParaRPr lang="en-US" sz="2600" dirty="0"/>
           </a:p>
         </p:txBody>
       </p:sp>
@@ -1981,7 +1981,7 @@
                 <a:ea typeface="Calibri" pitchFamily="34" charset="-122"/>
                 <a:cs typeface="Calibri" pitchFamily="34" charset="-120"/>
               </a:rPr>
-              <a:t>Claude can "think step by step" before answering, showing its reasoning process.</a:t>
+              <a:t>Think of it as: onboarding documentation for the AI, not for humans.</a:t>
             </a:r>
             <a:endParaRPr lang="en-US" sz="1400" dirty="0"/>
           </a:p>
@@ -1996,7 +1996,7 @@
         <p:spPr>
           <a:xfrm>
             <a:off x="457200" y="1508760"/>
-            <a:ext cx="2606040" cy="3291840"/>
+            <a:ext cx="3840480" cy="2743200"/>
           </a:xfrm>
           <a:prstGeom prst="rect">
             <a:avLst/>
@@ -2030,13 +2030,13 @@
         <p:spPr>
           <a:xfrm>
             <a:off x="457200" y="1508760"/>
-            <a:ext cx="2606040" cy="54864"/>
+            <a:ext cx="3840480" cy="54864"/>
           </a:xfrm>
           <a:prstGeom prst="rect">
             <a:avLst/>
           </a:prstGeom>
           <a:solidFill>
-            <a:srgbClr val="0EA5E9"/>
+            <a:srgbClr val="10B981"/>
           </a:solidFill>
           <a:ln/>
         </p:spPr>
@@ -2057,7 +2057,7 @@
         <p:spPr>
           <a:xfrm>
             <a:off x="640080" y="1691640"/>
-            <a:ext cx="2240280" cy="365760"/>
+            <a:ext cx="3474720" cy="320040"/>
           </a:xfrm>
           <a:prstGeom prst="rect">
             <a:avLst/>
@@ -2073,17 +2073,17 @@
               <a:buNone/>
             </a:pPr>
             <a:r>
-              <a:rPr lang="en-US" sz="1600" b="1" dirty="0">
-                <a:solidFill>
-                  <a:srgbClr val="0EA5E9"/>
+              <a:rPr lang="en-US" sz="1500" b="1" dirty="0">
+                <a:solidFill>
+                  <a:srgbClr val="10B981"/>
                 </a:solidFill>
                 <a:latin typeface="Trebuchet MS" pitchFamily="34" charset="0"/>
                 <a:ea typeface="Trebuchet MS" pitchFamily="34" charset="-122"/>
                 <a:cs typeface="Trebuchet MS" pitchFamily="34" charset="-120"/>
               </a:rPr>
-              <a:t>How it works</a:t>
-            </a:r>
-            <a:endParaRPr lang="en-US" sz="1600" dirty="0"/>
+              <a:t>What to include (~50-80 lines):</a:t>
+            </a:r>
+            <a:endParaRPr lang="en-US" sz="1500" dirty="0"/>
           </a:p>
         </p:txBody>
       </p:sp>
@@ -2095,8 +2095,8 @@
         </p:nvSpPr>
         <p:spPr>
           <a:xfrm>
-            <a:off x="640080" y="2148840"/>
-            <a:ext cx="2240280" cy="2468880"/>
+            <a:off x="640080" y="2057400"/>
+            <a:ext cx="3474720" cy="2011680"/>
           </a:xfrm>
           <a:prstGeom prst="rect">
             <a:avLst/>
@@ -2110,7 +2110,7 @@
           <a:p>
             <a:pPr marL="342900" indent="-342900">
               <a:spcAft>
-                <a:spcPts val="800"/>
+                <a:spcPts val="400"/>
               </a:spcAft>
               <a:buSzPct val="100000"/>
               <a:buChar char="•"/>
@@ -2124,14 +2124,14 @@
                 <a:ea typeface="Calibri" pitchFamily="34" charset="-122"/>
                 <a:cs typeface="Calibri" pitchFamily="34" charset="-120"/>
               </a:rPr>
-              <a:t>Generates internal reasoning tokens before visible response</a:t>
+              <a:t>One-line project description</a:t>
             </a:r>
             <a:endParaRPr lang="en-US" sz="1200" dirty="0"/>
           </a:p>
           <a:p>
             <a:pPr marL="342900" indent="-342900">
               <a:spcAft>
-                <a:spcPts val="800"/>
+                <a:spcPts val="400"/>
               </a:spcAft>
               <a:buSzPct val="100000"/>
               <a:buChar char="•"/>
@@ -2145,14 +2145,14 @@
                 <a:ea typeface="Calibri" pitchFamily="34" charset="-122"/>
                 <a:cs typeface="Calibri" pitchFamily="34" charset="-120"/>
               </a:rPr>
-              <a:t>Enable with alwaysThinkingEnabled: true in settings</a:t>
+              <a:t>Tech stack (exact versions matter)</a:t>
             </a:r>
             <a:endParaRPr lang="en-US" sz="1200" dirty="0"/>
           </a:p>
           <a:p>
             <a:pPr marL="342900" indent="-342900">
               <a:spcAft>
-                <a:spcPts val="800"/>
+                <a:spcPts val="400"/>
               </a:spcAft>
               <a:buSzPct val="100000"/>
               <a:buChar char="•"/>
@@ -2166,10 +2166,73 @@
                 <a:ea typeface="Calibri" pitchFamily="34" charset="-122"/>
                 <a:cs typeface="Calibri" pitchFamily="34" charset="-120"/>
               </a:rPr>
-              <a:t>Opus engages deep reasoning automatically</a:t>
+              <a:t>Build, test, and lint commands</a:t>
             </a:r>
             <a:endParaRPr lang="en-US" sz="1200" dirty="0"/>
           </a:p>
+          <a:p>
+            <a:pPr marL="342900" indent="-342900">
+              <a:spcAft>
+                <a:spcPts val="400"/>
+              </a:spcAft>
+              <a:buSzPct val="100000"/>
+              <a:buChar char="•"/>
+            </a:pPr>
+            <a:r>
+              <a:rPr lang="en-US" sz="1200" dirty="0">
+                <a:solidFill>
+                  <a:srgbClr val="1E293B"/>
+                </a:solidFill>
+                <a:latin typeface="Calibri" pitchFamily="34" charset="0"/>
+                <a:ea typeface="Calibri" pitchFamily="34" charset="-122"/>
+                <a:cs typeface="Calibri" pitchFamily="34" charset="-120"/>
+              </a:rPr>
+              <a:t>Architecture overview (app structure, key patterns)</a:t>
+            </a:r>
+            <a:endParaRPr lang="en-US" sz="1200" dirty="0"/>
+          </a:p>
+          <a:p>
+            <a:pPr marL="342900" indent="-342900">
+              <a:spcAft>
+                <a:spcPts val="400"/>
+              </a:spcAft>
+              <a:buSzPct val="100000"/>
+              <a:buChar char="•"/>
+            </a:pPr>
+            <a:r>
+              <a:rPr lang="en-US" sz="1200" dirty="0">
+                <a:solidFill>
+                  <a:srgbClr val="1E293B"/>
+                </a:solidFill>
+                <a:latin typeface="Calibri" pitchFamily="34" charset="0"/>
+                <a:ea typeface="Calibri" pitchFamily="34" charset="-122"/>
+                <a:cs typeface="Calibri" pitchFamily="34" charset="-120"/>
+              </a:rPr>
+              <a:t>Important relationships and gotchas</a:t>
+            </a:r>
+            <a:endParaRPr lang="en-US" sz="1200" dirty="0"/>
+          </a:p>
+          <a:p>
+            <a:pPr marL="342900" indent="-342900">
+              <a:spcAft>
+                <a:spcPts val="400"/>
+              </a:spcAft>
+              <a:buSzPct val="100000"/>
+              <a:buChar char="•"/>
+            </a:pPr>
+            <a:r>
+              <a:rPr lang="en-US" sz="1200" dirty="0">
+                <a:solidFill>
+                  <a:srgbClr val="1E293B"/>
+                </a:solidFill>
+                <a:latin typeface="Calibri" pitchFamily="34" charset="0"/>
+                <a:ea typeface="Calibri" pitchFamily="34" charset="-122"/>
+                <a:cs typeface="Calibri" pitchFamily="34" charset="-120"/>
+              </a:rPr>
+              <a:t>What NOT to do (critical constraints)</a:t>
+            </a:r>
+            <a:endParaRPr lang="en-US" sz="1200" dirty="0"/>
+          </a:p>
         </p:txBody>
       </p:sp>
       <p:sp>
@@ -2180,8 +2243,8 @@
         </p:nvSpPr>
         <p:spPr>
           <a:xfrm>
-            <a:off x="3291840" y="1508760"/>
-            <a:ext cx="2606040" cy="3291840"/>
+            <a:off x="4846320" y="1508760"/>
+            <a:ext cx="3840480" cy="2743200"/>
           </a:xfrm>
           <a:prstGeom prst="rect">
             <a:avLst/>
@@ -2214,14 +2277,14 @@
         </p:nvSpPr>
         <p:spPr>
           <a:xfrm>
-            <a:off x="3291840" y="1508760"/>
-            <a:ext cx="2606040" cy="54864"/>
+            <a:off x="4846320" y="1508760"/>
+            <a:ext cx="3840480" cy="54864"/>
           </a:xfrm>
           <a:prstGeom prst="rect">
             <a:avLst/>
           </a:prstGeom>
           <a:solidFill>
-            <a:srgbClr val="0D9488"/>
+            <a:srgbClr val="EF4444"/>
           </a:solidFill>
           <a:ln/>
         </p:spPr>
@@ -2241,8 +2304,8 @@
         </p:nvSpPr>
         <p:spPr>
           <a:xfrm>
-            <a:off x="3474720" y="1691640"/>
-            <a:ext cx="2240280" cy="365760"/>
+            <a:off x="5029200" y="1691640"/>
+            <a:ext cx="3474720" cy="320040"/>
           </a:xfrm>
           <a:prstGeom prst="rect">
             <a:avLst/>
@@ -2258,17 +2321,17 @@
               <a:buNone/>
             </a:pPr>
             <a:r>
-              <a:rPr lang="en-US" sz="1600" b="1" dirty="0">
-                <a:solidFill>
-                  <a:srgbClr val="0D9488"/>
+              <a:rPr lang="en-US" sz="1500" b="1" dirty="0">
+                <a:solidFill>
+                  <a:srgbClr val="EF4444"/>
                 </a:solidFill>
                 <a:latin typeface="Trebuchet MS" pitchFamily="34" charset="0"/>
                 <a:ea typeface="Trebuchet MS" pitchFamily="34" charset="-122"/>
                 <a:cs typeface="Trebuchet MS" pitchFamily="34" charset="-120"/>
               </a:rPr>
-              <a:t>When it helps</a:t>
-            </a:r>
-            <a:endParaRPr lang="en-US" sz="1600" dirty="0"/>
+              <a:t>What NOT to include:</a:t>
+            </a:r>
+            <a:endParaRPr lang="en-US" sz="1500" dirty="0"/>
           </a:p>
         </p:txBody>
       </p:sp>
@@ -2280,8 +2343,8 @@
         </p:nvSpPr>
         <p:spPr>
           <a:xfrm>
-            <a:off x="3474720" y="2148840"/>
-            <a:ext cx="2240280" cy="2468880"/>
+            <a:off x="5029200" y="2057400"/>
+            <a:ext cx="3474720" cy="2011680"/>
           </a:xfrm>
           <a:prstGeom prst="rect">
             <a:avLst/>
@@ -2295,7 +2358,7 @@
           <a:p>
             <a:pPr marL="342900" indent="-342900">
               <a:spcAft>
-                <a:spcPts val="800"/>
+                <a:spcPts val="400"/>
               </a:spcAft>
               <a:buSzPct val="100000"/>
               <a:buChar char="•"/>
@@ -2309,14 +2372,14 @@
                 <a:ea typeface="Calibri" pitchFamily="34" charset="-122"/>
                 <a:cs typeface="Calibri" pitchFamily="34" charset="-120"/>
               </a:rPr>
-              <a:t>Debugging complex issues with multiple possible causes</a:t>
+              <a:t>Generic instructions ("write clean code")</a:t>
             </a:r>
             <a:endParaRPr lang="en-US" sz="1200" dirty="0"/>
           </a:p>
           <a:p>
             <a:pPr marL="342900" indent="-342900">
               <a:spcAft>
-                <a:spcPts val="800"/>
+                <a:spcPts val="400"/>
               </a:spcAft>
               <a:buSzPct val="100000"/>
               <a:buChar char="•"/>
@@ -2330,14 +2393,14 @@
                 <a:ea typeface="Calibri" pitchFamily="34" charset="-122"/>
                 <a:cs typeface="Calibri" pitchFamily="34" charset="-120"/>
               </a:rPr>
-              <a:t>Planning a multi-step refactor</a:t>
+              <a:t>Formatting rules — use linters instead</a:t>
             </a:r>
             <a:endParaRPr lang="en-US" sz="1200" dirty="0"/>
           </a:p>
           <a:p>
             <a:pPr marL="342900" indent="-342900">
               <a:spcAft>
-                <a:spcPts val="800"/>
+                <a:spcPts val="400"/>
               </a:spcAft>
               <a:buSzPct val="100000"/>
               <a:buChar char="•"/>
@@ -2351,7 +2414,7 @@
                 <a:ea typeface="Calibri" pitchFamily="34" charset="-122"/>
                 <a:cs typeface="Calibri" pitchFamily="34" charset="-120"/>
               </a:rPr>
-              <a:t>Understanding unfamiliar code with complex logic</a:t>
+              <a:t>Everything — keep it lean (~150-200 instructions max)</a:t>
             </a:r>
             <a:endParaRPr lang="en-US" sz="1200" dirty="0"/>
           </a:p>
@@ -2365,23 +2428,16 @@
         </p:nvSpPr>
         <p:spPr>
           <a:xfrm>
-            <a:off x="6126480" y="1508760"/>
-            <a:ext cx="2606040" cy="3291840"/>
+            <a:off x="457200" y="4434840"/>
+            <a:ext cx="8229600" cy="502920"/>
           </a:xfrm>
           <a:prstGeom prst="rect">
             <a:avLst/>
           </a:prstGeom>
           <a:solidFill>
-            <a:srgbClr val="FFFFFF"/>
+            <a:srgbClr val="0F172A"/>
           </a:solidFill>
           <a:ln/>
-          <a:effectLst>
-            <a:outerShdw blurRad="101600" dist="25400" dir="8100000" algn="bl" rotWithShape="0">
-              <a:srgbClr val="000000">
-                <a:alpha val="8000"/>
-              </a:srgbClr>
-            </a:outerShdw>
-          </a:effectLst>
         </p:spPr>
         <p:txBody>
           <a:bodyPr/>
@@ -2393,41 +2449,14 @@
       </p:sp>
       <p:sp>
         <p:nvSpPr>
-          <p:cNvPr id="14" name="Shape 12"/>
-          <p:cNvSpPr/>
-          <p:nvPr/>
-        </p:nvSpPr>
-        <p:spPr>
-          <a:xfrm>
-            <a:off x="6126480" y="1508760"/>
-            <a:ext cx="2606040" cy="54864"/>
-          </a:xfrm>
-          <a:prstGeom prst="rect">
-            <a:avLst/>
-          </a:prstGeom>
-          <a:solidFill>
-            <a:srgbClr val="F59E0B"/>
-          </a:solidFill>
-          <a:ln/>
-        </p:spPr>
-        <p:txBody>
-          <a:bodyPr/>
-          <a:lstStyle/>
-          <a:p>
-            <a:endParaRPr lang="en-US"/>
-          </a:p>
-        </p:txBody>
-      </p:sp>
-      <p:sp>
-        <p:nvSpPr>
-          <p:cNvPr id="15" name="Text 13"/>
-          <p:cNvSpPr/>
-          <p:nvPr/>
-        </p:nvSpPr>
-        <p:spPr>
-          <a:xfrm>
-            <a:off x="6309360" y="1691640"/>
-            <a:ext cx="2240280" cy="365760"/>
+          <p:cNvPr id="14" name="Text 12"/>
+          <p:cNvSpPr/>
+          <p:nvPr/>
+        </p:nvSpPr>
+        <p:spPr>
+          <a:xfrm>
+            <a:off x="731520" y="4434840"/>
+            <a:ext cx="7772400" cy="502920"/>
           </a:xfrm>
           <a:prstGeom prst="rect">
             <a:avLst/>
@@ -2443,102 +2472,39 @@
               <a:buNone/>
             </a:pPr>
             <a:r>
-              <a:rPr lang="en-US" sz="1600" b="1" dirty="0">
-                <a:solidFill>
-                  <a:srgbClr val="F59E0B"/>
-                </a:solidFill>
-                <a:latin typeface="Trebuchet MS" pitchFamily="34" charset="0"/>
-                <a:ea typeface="Trebuchet MS" pitchFamily="34" charset="-122"/>
-                <a:cs typeface="Trebuchet MS" pitchFamily="34" charset="-120"/>
-              </a:rPr>
-              <a:t>Trade-off</a:t>
-            </a:r>
-            <a:endParaRPr lang="en-US" sz="1600" dirty="0"/>
-          </a:p>
-        </p:txBody>
-      </p:sp>
-      <p:sp>
-        <p:nvSpPr>
-          <p:cNvPr id="16" name="Text 14"/>
-          <p:cNvSpPr/>
-          <p:nvPr/>
-        </p:nvSpPr>
-        <p:spPr>
-          <a:xfrm>
-            <a:off x="6309360" y="2148840"/>
-            <a:ext cx="2240280" cy="2468880"/>
-          </a:xfrm>
-          <a:prstGeom prst="rect">
-            <a:avLst/>
-          </a:prstGeom>
-          <a:noFill/>
-          <a:ln/>
-        </p:spPr>
-        <p:txBody>
-          <a:bodyPr wrap="square" lIns="0" tIns="0" rIns="0" bIns="0" rtlCol="0" anchor="ctr"/>
-          <a:lstStyle/>
-          <a:p>
-            <a:pPr marL="342900" indent="-342900">
-              <a:spcAft>
-                <a:spcPts val="800"/>
-              </a:spcAft>
-              <a:buSzPct val="100000"/>
-              <a:buChar char="•"/>
-            </a:pPr>
-            <a:r>
-              <a:rPr lang="en-US" sz="1200" dirty="0">
-                <a:solidFill>
-                  <a:srgbClr val="1E293B"/>
+              <a:rPr lang="en-US" sz="1300" b="1" dirty="0">
+                <a:solidFill>
+                  <a:srgbClr val="0EA5E9"/>
                 </a:solidFill>
                 <a:latin typeface="Calibri" pitchFamily="34" charset="0"/>
                 <a:ea typeface="Calibri" pitchFamily="34" charset="-122"/>
                 <a:cs typeface="Calibri" pitchFamily="34" charset="-120"/>
               </a:rPr>
-              <a:t>More thinking = better answers</a:t>
-            </a:r>
-            <a:endParaRPr lang="en-US" sz="1200" dirty="0"/>
-          </a:p>
-          <a:p>
-            <a:pPr marL="342900" indent="-342900">
-              <a:spcAft>
-                <a:spcPts val="800"/>
-              </a:spcAft>
-              <a:buSzPct val="100000"/>
-              <a:buChar char="•"/>
-            </a:pPr>
-            <a:r>
-              <a:rPr lang="en-US" sz="1200" dirty="0">
-                <a:solidFill>
-                  <a:srgbClr val="1E293B"/>
+              <a:t>Hierarchy:  </a:t>
+            </a:r>
+            <a:r>
+              <a:rPr lang="en-US" sz="1300" dirty="0">
+                <a:solidFill>
+                  <a:srgbClr val="FFFFFF"/>
                 </a:solidFill>
                 <a:latin typeface="Calibri" pitchFamily="34" charset="0"/>
                 <a:ea typeface="Calibri" pitchFamily="34" charset="-122"/>
                 <a:cs typeface="Calibri" pitchFamily="34" charset="-120"/>
               </a:rPr>
-              <a:t>But more tokens and longer wait</a:t>
-            </a:r>
-            <a:endParaRPr lang="en-US" sz="1200" dirty="0"/>
-          </a:p>
-          <a:p>
-            <a:pPr marL="342900" indent="-342900">
-              <a:spcAft>
-                <a:spcPts val="800"/>
-              </a:spcAft>
-              <a:buSzPct val="100000"/>
-              <a:buChar char="•"/>
-            </a:pPr>
-            <a:r>
-              <a:rPr lang="en-US" sz="1200" dirty="0">
-                <a:solidFill>
-                  <a:srgbClr val="1E293B"/>
+              <a:t>managed  &gt;  command-line  &gt;  local  &gt;  project  &gt;  user</a:t>
+            </a:r>
+            <a:r>
+              <a:rPr lang="en-US" sz="1300" i="1" dirty="0">
+                <a:solidFill>
+                  <a:srgbClr val="64748B"/>
                 </a:solidFill>
                 <a:latin typeface="Calibri" pitchFamily="34" charset="0"/>
                 <a:ea typeface="Calibri" pitchFamily="34" charset="-122"/>
                 <a:cs typeface="Calibri" pitchFamily="34" charset="-120"/>
               </a:rPr>
-              <a:t>For quick tasks, it's overhead</a:t>
-            </a:r>
-            <a:endParaRPr lang="en-US" sz="1200" dirty="0"/>
+              <a:t>    (More specific always wins)</a:t>
+            </a:r>
+            <a:endParaRPr lang="en-US" sz="1300" dirty="0"/>
           </a:p>
         </p:txBody>
       </p:sp>
@@ -2552,7 +2518,7 @@
 
 <file path=ppt/slides/slide11.xml><?xml version="1.0" encoding="utf-8"?>
 <p:sld xmlns:a="http://schemas.openxmlformats.org/drawingml/2006/main" xmlns:r="http://schemas.openxmlformats.org/officeDocument/2006/relationships" xmlns:p="http://schemas.openxmlformats.org/presentationml/2006/main">
-  <p:cSld name="Slide 11">
+  <p:cSld name="Slide 8">
     <p:bg>
       <p:bgPr>
         <a:solidFill>
@@ -2627,7 +2593,7 @@
               <a:buNone/>
             </a:pPr>
             <a:r>
-              <a:rPr lang="en-US" sz="2800" b="1" dirty="0">
+              <a:rPr lang="en-US" sz="2600" b="1" dirty="0">
                 <a:solidFill>
                   <a:srgbClr val="FFFFFF"/>
                 </a:solidFill>
@@ -2635,22 +2601,49 @@
                 <a:ea typeface="Trebuchet MS" pitchFamily="34" charset="-122"/>
                 <a:cs typeface="Trebuchet MS" pitchFamily="34" charset="-120"/>
               </a:rPr>
-              <a:t>Plan Mode — Your Safety Net</a:t>
-            </a:r>
-            <a:endParaRPr lang="en-US" sz="2800" dirty="0"/>
-          </a:p>
-        </p:txBody>
-      </p:sp>
-      <p:sp>
-        <p:nvSpPr>
-          <p:cNvPr id="4" name="Text 2"/>
-          <p:cNvSpPr/>
-          <p:nvPr/>
-        </p:nvSpPr>
-        <p:spPr>
-          <a:xfrm>
-            <a:off x="731520" y="960120"/>
-            <a:ext cx="7680960" cy="320040"/>
+              <a:t>The settings.json 5-Tier Hierarchy</a:t>
+            </a:r>
+            <a:endParaRPr lang="en-US" sz="2600" dirty="0"/>
+          </a:p>
+        </p:txBody>
+      </p:sp>
+      <p:sp>
+        <p:nvSpPr>
+          <p:cNvPr id="4" name="Shape 2"/>
+          <p:cNvSpPr/>
+          <p:nvPr/>
+        </p:nvSpPr>
+        <p:spPr>
+          <a:xfrm>
+            <a:off x="548640" y="1097280"/>
+            <a:ext cx="411480" cy="411480"/>
+          </a:xfrm>
+          <a:prstGeom prst="ellipse">
+            <a:avLst/>
+          </a:prstGeom>
+          <a:solidFill>
+            <a:srgbClr val="8B5CF6"/>
+          </a:solidFill>
+          <a:ln/>
+        </p:spPr>
+        <p:txBody>
+          <a:bodyPr/>
+          <a:lstStyle/>
+          <a:p>
+            <a:endParaRPr lang="en-US"/>
+          </a:p>
+        </p:txBody>
+      </p:sp>
+      <p:sp>
+        <p:nvSpPr>
+          <p:cNvPr id="5" name="Text 3"/>
+          <p:cNvSpPr/>
+          <p:nvPr/>
+        </p:nvSpPr>
+        <p:spPr>
+          <a:xfrm>
+            <a:off x="548640" y="1097280"/>
+            <a:ext cx="411480" cy="411480"/>
           </a:xfrm>
           <a:prstGeom prst="rect">
             <a:avLst/>
@@ -2662,34 +2655,34 @@
           <a:bodyPr wrap="square" lIns="0" tIns="0" rIns="0" bIns="0" rtlCol="0" anchor="ctr"/>
           <a:lstStyle/>
           <a:p>
-            <a:pPr marL="0" indent="0">
+            <a:pPr marL="0" indent="0" algn="ctr">
               <a:buNone/>
             </a:pPr>
             <a:r>
-              <a:rPr lang="en-US" sz="1400" i="1" dirty="0">
-                <a:solidFill>
-                  <a:srgbClr val="64748B"/>
-                </a:solidFill>
-                <a:latin typeface="Calibri" pitchFamily="34" charset="0"/>
-                <a:ea typeface="Calibri" pitchFamily="34" charset="-122"/>
-                <a:cs typeface="Calibri" pitchFamily="34" charset="-120"/>
-              </a:rPr>
-              <a:t>Restricts Claude to read-only operations. No file edits, no commands.</a:t>
-            </a:r>
-            <a:endParaRPr lang="en-US" sz="1400" dirty="0"/>
-          </a:p>
-        </p:txBody>
-      </p:sp>
-      <p:sp>
-        <p:nvSpPr>
-          <p:cNvPr id="5" name="Shape 3"/>
-          <p:cNvSpPr/>
-          <p:nvPr/>
-        </p:nvSpPr>
-        <p:spPr>
-          <a:xfrm>
-            <a:off x="457200" y="1417320"/>
-            <a:ext cx="3840480" cy="1645920"/>
+              <a:rPr lang="en-US" sz="1600" b="1" dirty="0">
+                <a:solidFill>
+                  <a:srgbClr val="FFFFFF"/>
+                </a:solidFill>
+                <a:latin typeface="Trebuchet MS" pitchFamily="34" charset="0"/>
+                <a:ea typeface="Trebuchet MS" pitchFamily="34" charset="-122"/>
+                <a:cs typeface="Trebuchet MS" pitchFamily="34" charset="-120"/>
+              </a:rPr>
+              <a:t>1</a:t>
+            </a:r>
+            <a:endParaRPr lang="en-US" sz="1600" dirty="0"/>
+          </a:p>
+        </p:txBody>
+      </p:sp>
+      <p:sp>
+        <p:nvSpPr>
+          <p:cNvPr id="6" name="Shape 4"/>
+          <p:cNvSpPr/>
+          <p:nvPr/>
+        </p:nvSpPr>
+        <p:spPr>
+          <a:xfrm>
+            <a:off x="1097280" y="1051560"/>
+            <a:ext cx="7498080" cy="475488"/>
           </a:xfrm>
           <a:prstGeom prst="rect">
             <a:avLst/>
@@ -2716,41 +2709,14 @@
       </p:sp>
       <p:sp>
         <p:nvSpPr>
-          <p:cNvPr id="6" name="Shape 4"/>
-          <p:cNvSpPr/>
-          <p:nvPr/>
-        </p:nvSpPr>
-        <p:spPr>
-          <a:xfrm>
-            <a:off x="457200" y="1417320"/>
-            <a:ext cx="3840480" cy="54864"/>
-          </a:xfrm>
-          <a:prstGeom prst="rect">
-            <a:avLst/>
-          </a:prstGeom>
-          <a:solidFill>
-            <a:srgbClr val="10B981"/>
-          </a:solidFill>
-          <a:ln/>
-        </p:spPr>
-        <p:txBody>
-          <a:bodyPr/>
-          <a:lstStyle/>
-          <a:p>
-            <a:endParaRPr lang="en-US"/>
-          </a:p>
-        </p:txBody>
-      </p:sp>
-      <p:sp>
-        <p:nvSpPr>
           <p:cNvPr id="7" name="Text 5"/>
           <p:cNvSpPr/>
           <p:nvPr/>
         </p:nvSpPr>
         <p:spPr>
           <a:xfrm>
-            <a:off x="640080" y="1554480"/>
-            <a:ext cx="3474720" cy="274320"/>
+            <a:off x="1280160" y="1051560"/>
+            <a:ext cx="1188720" cy="475488"/>
           </a:xfrm>
           <a:prstGeom prst="rect">
             <a:avLst/>
@@ -2768,13 +2734,13 @@
             <a:r>
               <a:rPr lang="en-US" sz="1400" b="1" dirty="0">
                 <a:solidFill>
-                  <a:srgbClr val="10B981"/>
+                  <a:srgbClr val="8B5CF6"/>
                 </a:solidFill>
                 <a:latin typeface="Trebuchet MS" pitchFamily="34" charset="0"/>
                 <a:ea typeface="Trebuchet MS" pitchFamily="34" charset="-122"/>
                 <a:cs typeface="Trebuchet MS" pitchFamily="34" charset="-120"/>
               </a:rPr>
-              <a:t>CAN do in Plan Mode:</a:t>
+              <a:t>Managed</a:t>
             </a:r>
             <a:endParaRPr lang="en-US" sz="1400" dirty="0"/>
           </a:p>
@@ -2788,8 +2754,8 @@
         </p:nvSpPr>
         <p:spPr>
           <a:xfrm>
-            <a:off x="640080" y="1874520"/>
-            <a:ext cx="3474720" cy="1097280"/>
+            <a:off x="2560320" y="1051560"/>
+            <a:ext cx="3200400" cy="475488"/>
           </a:xfrm>
           <a:prstGeom prst="rect">
             <a:avLst/>
@@ -2801,101 +2767,139 @@
           <a:bodyPr wrap="square" lIns="0" tIns="0" rIns="0" bIns="0" rtlCol="0" anchor="ctr"/>
           <a:lstStyle/>
           <a:p>
-            <a:pPr marL="342900" indent="-342900">
-              <a:spcAft>
-                <a:spcPts val="300"/>
-              </a:spcAft>
-              <a:buSzPct val="100000"/>
-              <a:buChar char="•"/>
-            </a:pPr>
-            <a:r>
-              <a:rPr lang="en-US" sz="1100" dirty="0">
+            <a:pPr marL="0" indent="0">
+              <a:buNone/>
+            </a:pPr>
+            <a:r>
+              <a:rPr lang="en-US" sz="1200" dirty="0">
                 <a:solidFill>
                   <a:srgbClr val="1E293B"/>
+                </a:solidFill>
+                <a:latin typeface="Consolas" pitchFamily="34" charset="0"/>
+                <a:ea typeface="Consolas" pitchFamily="34" charset="-122"/>
+                <a:cs typeface="Consolas" pitchFamily="34" charset="-120"/>
+              </a:rPr>
+              <a:t>/etc/claude-code/</a:t>
+            </a:r>
+            <a:endParaRPr lang="en-US" sz="1200" dirty="0"/>
+          </a:p>
+        </p:txBody>
+      </p:sp>
+      <p:sp>
+        <p:nvSpPr>
+          <p:cNvPr id="9" name="Text 7"/>
+          <p:cNvSpPr/>
+          <p:nvPr/>
+        </p:nvSpPr>
+        <p:spPr>
+          <a:xfrm>
+            <a:off x="5943600" y="1051560"/>
+            <a:ext cx="2560320" cy="475488"/>
+          </a:xfrm>
+          <a:prstGeom prst="rect">
+            <a:avLst/>
+          </a:prstGeom>
+          <a:noFill/>
+          <a:ln/>
+        </p:spPr>
+        <p:txBody>
+          <a:bodyPr wrap="square" lIns="0" tIns="0" rIns="0" bIns="0" rtlCol="0" anchor="ctr"/>
+          <a:lstStyle/>
+          <a:p>
+            <a:pPr marL="0" indent="0" algn="r">
+              <a:buNone/>
+            </a:pPr>
+            <a:r>
+              <a:rPr lang="en-US" sz="1100" i="1" dirty="0">
+                <a:solidFill>
+                  <a:srgbClr val="64748B"/>
                 </a:solidFill>
                 <a:latin typeface="Calibri" pitchFamily="34" charset="0"/>
                 <a:ea typeface="Calibri" pitchFamily="34" charset="-122"/>
                 <a:cs typeface="Calibri" pitchFamily="34" charset="-120"/>
               </a:rPr>
-              <a:t>Read files (Read, Glob, Grep)</a:t>
+              <a:t>IT-deployed, highest priority</a:t>
             </a:r>
             <a:endParaRPr lang="en-US" sz="1100" dirty="0"/>
           </a:p>
-          <a:p>
-            <a:pPr marL="342900" indent="-342900">
-              <a:spcAft>
-                <a:spcPts val="300"/>
-              </a:spcAft>
-              <a:buSzPct val="100000"/>
-              <a:buChar char="•"/>
-            </a:pPr>
-            <a:r>
-              <a:rPr lang="en-US" sz="1100" dirty="0">
-                <a:solidFill>
-                  <a:srgbClr val="1E293B"/>
-                </a:solidFill>
-                <a:latin typeface="Calibri" pitchFamily="34" charset="0"/>
-                <a:ea typeface="Calibri" pitchFamily="34" charset="-122"/>
-                <a:cs typeface="Calibri" pitchFamily="34" charset="-120"/>
-              </a:rPr>
-              <a:t>Search the web (WebSearch, WebFetch)</a:t>
-            </a:r>
-            <a:endParaRPr lang="en-US" sz="1100" dirty="0"/>
-          </a:p>
-          <a:p>
-            <a:pPr marL="342900" indent="-342900">
-              <a:spcAft>
-                <a:spcPts val="300"/>
-              </a:spcAft>
-              <a:buSzPct val="100000"/>
-              <a:buChar char="•"/>
-            </a:pPr>
-            <a:r>
-              <a:rPr lang="en-US" sz="1100" dirty="0">
-                <a:solidFill>
-                  <a:srgbClr val="1E293B"/>
-                </a:solidFill>
-                <a:latin typeface="Calibri" pitchFamily="34" charset="0"/>
-                <a:ea typeface="Calibri" pitchFamily="34" charset="-122"/>
-                <a:cs typeface="Calibri" pitchFamily="34" charset="-120"/>
-              </a:rPr>
-              <a:t>Spawn research sub-agents</a:t>
-            </a:r>
-            <a:endParaRPr lang="en-US" sz="1100" dirty="0"/>
-          </a:p>
-          <a:p>
-            <a:pPr marL="342900" indent="-342900">
-              <a:spcAft>
-                <a:spcPts val="300"/>
-              </a:spcAft>
-              <a:buSzPct val="100000"/>
-              <a:buChar char="•"/>
-            </a:pPr>
-            <a:r>
-              <a:rPr lang="en-US" sz="1100" dirty="0">
-                <a:solidFill>
-                  <a:srgbClr val="1E293B"/>
-                </a:solidFill>
-                <a:latin typeface="Calibri" pitchFamily="34" charset="0"/>
-                <a:ea typeface="Calibri" pitchFamily="34" charset="-122"/>
-                <a:cs typeface="Calibri" pitchFamily="34" charset="-120"/>
-              </a:rPr>
-              <a:t>Write a plan and present it for approval</a:t>
-            </a:r>
-            <a:endParaRPr lang="en-US" sz="1100" dirty="0"/>
-          </a:p>
-        </p:txBody>
-      </p:sp>
-      <p:sp>
-        <p:nvSpPr>
-          <p:cNvPr id="9" name="Shape 7"/>
-          <p:cNvSpPr/>
-          <p:nvPr/>
-        </p:nvSpPr>
-        <p:spPr>
-          <a:xfrm>
-            <a:off x="4846320" y="1417320"/>
-            <a:ext cx="3840480" cy="1645920"/>
+        </p:txBody>
+      </p:sp>
+      <p:sp>
+        <p:nvSpPr>
+          <p:cNvPr id="10" name="Shape 8"/>
+          <p:cNvSpPr/>
+          <p:nvPr/>
+        </p:nvSpPr>
+        <p:spPr>
+          <a:xfrm>
+            <a:off x="548640" y="1664208"/>
+            <a:ext cx="411480" cy="411480"/>
+          </a:xfrm>
+          <a:prstGeom prst="ellipse">
+            <a:avLst/>
+          </a:prstGeom>
+          <a:solidFill>
+            <a:srgbClr val="0EA5E9"/>
+          </a:solidFill>
+          <a:ln/>
+        </p:spPr>
+        <p:txBody>
+          <a:bodyPr/>
+          <a:lstStyle/>
+          <a:p>
+            <a:endParaRPr lang="en-US"/>
+          </a:p>
+        </p:txBody>
+      </p:sp>
+      <p:sp>
+        <p:nvSpPr>
+          <p:cNvPr id="11" name="Text 9"/>
+          <p:cNvSpPr/>
+          <p:nvPr/>
+        </p:nvSpPr>
+        <p:spPr>
+          <a:xfrm>
+            <a:off x="548640" y="1664208"/>
+            <a:ext cx="411480" cy="411480"/>
+          </a:xfrm>
+          <a:prstGeom prst="rect">
+            <a:avLst/>
+          </a:prstGeom>
+          <a:noFill/>
+          <a:ln/>
+        </p:spPr>
+        <p:txBody>
+          <a:bodyPr wrap="square" lIns="0" tIns="0" rIns="0" bIns="0" rtlCol="0" anchor="ctr"/>
+          <a:lstStyle/>
+          <a:p>
+            <a:pPr marL="0" indent="0" algn="ctr">
+              <a:buNone/>
+            </a:pPr>
+            <a:r>
+              <a:rPr lang="en-US" sz="1600" b="1" dirty="0">
+                <a:solidFill>
+                  <a:srgbClr val="FFFFFF"/>
+                </a:solidFill>
+                <a:latin typeface="Trebuchet MS" pitchFamily="34" charset="0"/>
+                <a:ea typeface="Trebuchet MS" pitchFamily="34" charset="-122"/>
+                <a:cs typeface="Trebuchet MS" pitchFamily="34" charset="-120"/>
+              </a:rPr>
+              <a:t>2</a:t>
+            </a:r>
+            <a:endParaRPr lang="en-US" sz="1600" dirty="0"/>
+          </a:p>
+        </p:txBody>
+      </p:sp>
+      <p:sp>
+        <p:nvSpPr>
+          <p:cNvPr id="12" name="Shape 10"/>
+          <p:cNvSpPr/>
+          <p:nvPr/>
+        </p:nvSpPr>
+        <p:spPr>
+          <a:xfrm>
+            <a:off x="1097280" y="1618488"/>
+            <a:ext cx="7498080" cy="475488"/>
           </a:xfrm>
           <a:prstGeom prst="rect">
             <a:avLst/>
@@ -2922,41 +2926,14 @@
       </p:sp>
       <p:sp>
         <p:nvSpPr>
-          <p:cNvPr id="10" name="Shape 8"/>
-          <p:cNvSpPr/>
-          <p:nvPr/>
-        </p:nvSpPr>
-        <p:spPr>
-          <a:xfrm>
-            <a:off x="4846320" y="1417320"/>
-            <a:ext cx="3840480" cy="54864"/>
-          </a:xfrm>
-          <a:prstGeom prst="rect">
-            <a:avLst/>
-          </a:prstGeom>
-          <a:solidFill>
-            <a:srgbClr val="EF4444"/>
-          </a:solidFill>
-          <a:ln/>
-        </p:spPr>
-        <p:txBody>
-          <a:bodyPr/>
-          <a:lstStyle/>
-          <a:p>
-            <a:endParaRPr lang="en-US"/>
-          </a:p>
-        </p:txBody>
-      </p:sp>
-      <p:sp>
-        <p:nvSpPr>
-          <p:cNvPr id="11" name="Text 9"/>
-          <p:cNvSpPr/>
-          <p:nvPr/>
-        </p:nvSpPr>
-        <p:spPr>
-          <a:xfrm>
-            <a:off x="5029200" y="1554480"/>
-            <a:ext cx="3474720" cy="274320"/>
+          <p:cNvPr id="13" name="Text 11"/>
+          <p:cNvSpPr/>
+          <p:nvPr/>
+        </p:nvSpPr>
+        <p:spPr>
+          <a:xfrm>
+            <a:off x="1280160" y="1618488"/>
+            <a:ext cx="1188720" cy="475488"/>
           </a:xfrm>
           <a:prstGeom prst="rect">
             <a:avLst/>
@@ -2974,13 +2951,13 @@
             <a:r>
               <a:rPr lang="en-US" sz="1400" b="1" dirty="0">
                 <a:solidFill>
-                  <a:srgbClr val="EF4444"/>
+                  <a:srgbClr val="0EA5E9"/>
                 </a:solidFill>
                 <a:latin typeface="Trebuchet MS" pitchFamily="34" charset="0"/>
                 <a:ea typeface="Trebuchet MS" pitchFamily="34" charset="-122"/>
                 <a:cs typeface="Trebuchet MS" pitchFamily="34" charset="-120"/>
               </a:rPr>
-              <a:t>CANNOT do in Plan Mode:</a:t>
+              <a:t>CLI</a:t>
             </a:r>
             <a:endParaRPr lang="en-US" sz="1400" dirty="0"/>
           </a:p>
@@ -2988,14 +2965,14 @@
       </p:sp>
       <p:sp>
         <p:nvSpPr>
-          <p:cNvPr id="12" name="Text 10"/>
-          <p:cNvSpPr/>
-          <p:nvPr/>
-        </p:nvSpPr>
-        <p:spPr>
-          <a:xfrm>
-            <a:off x="5029200" y="1874520"/>
-            <a:ext cx="3474720" cy="1097280"/>
+          <p:cNvPr id="14" name="Text 12"/>
+          <p:cNvSpPr/>
+          <p:nvPr/>
+        </p:nvSpPr>
+        <p:spPr>
+          <a:xfrm>
+            <a:off x="2560320" y="1618488"/>
+            <a:ext cx="3200400" cy="475488"/>
           </a:xfrm>
           <a:prstGeom prst="rect">
             <a:avLst/>
@@ -3007,80 +2984,139 @@
           <a:bodyPr wrap="square" lIns="0" tIns="0" rIns="0" bIns="0" rtlCol="0" anchor="ctr"/>
           <a:lstStyle/>
           <a:p>
-            <a:pPr marL="342900" indent="-342900">
-              <a:spcAft>
-                <a:spcPts val="300"/>
-              </a:spcAft>
-              <a:buSzPct val="100000"/>
-              <a:buChar char="•"/>
-            </a:pPr>
-            <a:r>
-              <a:rPr lang="en-US" sz="1100" dirty="0">
+            <a:pPr marL="0" indent="0">
+              <a:buNone/>
+            </a:pPr>
+            <a:r>
+              <a:rPr lang="en-US" sz="1200" dirty="0">
                 <a:solidFill>
                   <a:srgbClr val="1E293B"/>
+                </a:solidFill>
+                <a:latin typeface="Consolas" pitchFamily="34" charset="0"/>
+                <a:ea typeface="Consolas" pitchFamily="34" charset="-122"/>
+                <a:cs typeface="Consolas" pitchFamily="34" charset="-120"/>
+              </a:rPr>
+              <a:t>--settings flag</a:t>
+            </a:r>
+            <a:endParaRPr lang="en-US" sz="1200" dirty="0"/>
+          </a:p>
+        </p:txBody>
+      </p:sp>
+      <p:sp>
+        <p:nvSpPr>
+          <p:cNvPr id="15" name="Text 13"/>
+          <p:cNvSpPr/>
+          <p:nvPr/>
+        </p:nvSpPr>
+        <p:spPr>
+          <a:xfrm>
+            <a:off x="5943600" y="1618488"/>
+            <a:ext cx="2560320" cy="475488"/>
+          </a:xfrm>
+          <a:prstGeom prst="rect">
+            <a:avLst/>
+          </a:prstGeom>
+          <a:noFill/>
+          <a:ln/>
+        </p:spPr>
+        <p:txBody>
+          <a:bodyPr wrap="square" lIns="0" tIns="0" rIns="0" bIns="0" rtlCol="0" anchor="ctr"/>
+          <a:lstStyle/>
+          <a:p>
+            <a:pPr marL="0" indent="0" algn="r">
+              <a:buNone/>
+            </a:pPr>
+            <a:r>
+              <a:rPr lang="en-US" sz="1100" i="1" dirty="0">
+                <a:solidFill>
+                  <a:srgbClr val="64748B"/>
                 </a:solidFill>
                 <a:latin typeface="Calibri" pitchFamily="34" charset="0"/>
                 <a:ea typeface="Calibri" pitchFamily="34" charset="-122"/>
                 <a:cs typeface="Calibri" pitchFamily="34" charset="-120"/>
               </a:rPr>
-              <a:t>Edit or create files</a:t>
+              <a:t>Session only</a:t>
             </a:r>
             <a:endParaRPr lang="en-US" sz="1100" dirty="0"/>
           </a:p>
-          <a:p>
-            <a:pPr marL="342900" indent="-342900">
-              <a:spcAft>
-                <a:spcPts val="300"/>
-              </a:spcAft>
-              <a:buSzPct val="100000"/>
-              <a:buChar char="•"/>
-            </a:pPr>
-            <a:r>
-              <a:rPr lang="en-US" sz="1100" dirty="0">
-                <a:solidFill>
-                  <a:srgbClr val="1E293B"/>
-                </a:solidFill>
-                <a:latin typeface="Calibri" pitchFamily="34" charset="0"/>
-                <a:ea typeface="Calibri" pitchFamily="34" charset="-122"/>
-                <a:cs typeface="Calibri" pitchFamily="34" charset="-120"/>
-              </a:rPr>
-              <a:t>Run shell commands</a:t>
-            </a:r>
-            <a:endParaRPr lang="en-US" sz="1100" dirty="0"/>
-          </a:p>
-          <a:p>
-            <a:pPr marL="342900" indent="-342900">
-              <a:spcAft>
-                <a:spcPts val="300"/>
-              </a:spcAft>
-              <a:buSzPct val="100000"/>
-              <a:buChar char="•"/>
-            </a:pPr>
-            <a:r>
-              <a:rPr lang="en-US" sz="1100" dirty="0">
-                <a:solidFill>
-                  <a:srgbClr val="1E293B"/>
-                </a:solidFill>
-                <a:latin typeface="Calibri" pitchFamily="34" charset="0"/>
-                <a:ea typeface="Calibri" pitchFamily="34" charset="-122"/>
-                <a:cs typeface="Calibri" pitchFamily="34" charset="-120"/>
-              </a:rPr>
-              <a:t>Make any changes to your project</a:t>
-            </a:r>
-            <a:endParaRPr lang="en-US" sz="1100" dirty="0"/>
-          </a:p>
-        </p:txBody>
-      </p:sp>
-      <p:sp>
-        <p:nvSpPr>
-          <p:cNvPr id="13" name="Shape 11"/>
-          <p:cNvSpPr/>
-          <p:nvPr/>
-        </p:nvSpPr>
-        <p:spPr>
-          <a:xfrm>
-            <a:off x="457200" y="3246120"/>
-            <a:ext cx="3840480" cy="1691640"/>
+        </p:txBody>
+      </p:sp>
+      <p:sp>
+        <p:nvSpPr>
+          <p:cNvPr id="16" name="Shape 14"/>
+          <p:cNvSpPr/>
+          <p:nvPr/>
+        </p:nvSpPr>
+        <p:spPr>
+          <a:xfrm>
+            <a:off x="548640" y="2231136"/>
+            <a:ext cx="411480" cy="411480"/>
+          </a:xfrm>
+          <a:prstGeom prst="ellipse">
+            <a:avLst/>
+          </a:prstGeom>
+          <a:solidFill>
+            <a:srgbClr val="0D9488"/>
+          </a:solidFill>
+          <a:ln/>
+        </p:spPr>
+        <p:txBody>
+          <a:bodyPr/>
+          <a:lstStyle/>
+          <a:p>
+            <a:endParaRPr lang="en-US"/>
+          </a:p>
+        </p:txBody>
+      </p:sp>
+      <p:sp>
+        <p:nvSpPr>
+          <p:cNvPr id="17" name="Text 15"/>
+          <p:cNvSpPr/>
+          <p:nvPr/>
+        </p:nvSpPr>
+        <p:spPr>
+          <a:xfrm>
+            <a:off x="548640" y="2231136"/>
+            <a:ext cx="411480" cy="411480"/>
+          </a:xfrm>
+          <a:prstGeom prst="rect">
+            <a:avLst/>
+          </a:prstGeom>
+          <a:noFill/>
+          <a:ln/>
+        </p:spPr>
+        <p:txBody>
+          <a:bodyPr wrap="square" lIns="0" tIns="0" rIns="0" bIns="0" rtlCol="0" anchor="ctr"/>
+          <a:lstStyle/>
+          <a:p>
+            <a:pPr marL="0" indent="0" algn="ctr">
+              <a:buNone/>
+            </a:pPr>
+            <a:r>
+              <a:rPr lang="en-US" sz="1600" b="1" dirty="0">
+                <a:solidFill>
+                  <a:srgbClr val="FFFFFF"/>
+                </a:solidFill>
+                <a:latin typeface="Trebuchet MS" pitchFamily="34" charset="0"/>
+                <a:ea typeface="Trebuchet MS" pitchFamily="34" charset="-122"/>
+                <a:cs typeface="Trebuchet MS" pitchFamily="34" charset="-120"/>
+              </a:rPr>
+              <a:t>3</a:t>
+            </a:r>
+            <a:endParaRPr lang="en-US" sz="1600" dirty="0"/>
+          </a:p>
+        </p:txBody>
+      </p:sp>
+      <p:sp>
+        <p:nvSpPr>
+          <p:cNvPr id="18" name="Shape 16"/>
+          <p:cNvSpPr/>
+          <p:nvPr/>
+        </p:nvSpPr>
+        <p:spPr>
+          <a:xfrm>
+            <a:off x="1097280" y="2185416"/>
+            <a:ext cx="7498080" cy="475488"/>
           </a:xfrm>
           <a:prstGeom prst="rect">
             <a:avLst/>
@@ -3107,41 +3143,14 @@
       </p:sp>
       <p:sp>
         <p:nvSpPr>
-          <p:cNvPr id="14" name="Shape 12"/>
-          <p:cNvSpPr/>
-          <p:nvPr/>
-        </p:nvSpPr>
-        <p:spPr>
-          <a:xfrm>
-            <a:off x="457200" y="3246120"/>
-            <a:ext cx="3840480" cy="54864"/>
-          </a:xfrm>
-          <a:prstGeom prst="rect">
-            <a:avLst/>
-          </a:prstGeom>
-          <a:solidFill>
-            <a:srgbClr val="0EA5E9"/>
-          </a:solidFill>
-          <a:ln/>
-        </p:spPr>
-        <p:txBody>
-          <a:bodyPr/>
-          <a:lstStyle/>
-          <a:p>
-            <a:endParaRPr lang="en-US"/>
-          </a:p>
-        </p:txBody>
-      </p:sp>
-      <p:sp>
-        <p:nvSpPr>
-          <p:cNvPr id="15" name="Text 13"/>
-          <p:cNvSpPr/>
-          <p:nvPr/>
-        </p:nvSpPr>
-        <p:spPr>
-          <a:xfrm>
-            <a:off x="640080" y="3383280"/>
-            <a:ext cx="3474720" cy="274320"/>
+          <p:cNvPr id="19" name="Text 17"/>
+          <p:cNvSpPr/>
+          <p:nvPr/>
+        </p:nvSpPr>
+        <p:spPr>
+          <a:xfrm>
+            <a:off x="1280160" y="2185416"/>
+            <a:ext cx="1188720" cy="475488"/>
           </a:xfrm>
           <a:prstGeom prst="rect">
             <a:avLst/>
@@ -3159,13 +3168,13 @@
             <a:r>
               <a:rPr lang="en-US" sz="1400" b="1" dirty="0">
                 <a:solidFill>
-                  <a:srgbClr val="0EA5E9"/>
+                  <a:srgbClr val="0D9488"/>
                 </a:solidFill>
                 <a:latin typeface="Trebuchet MS" pitchFamily="34" charset="0"/>
                 <a:ea typeface="Trebuchet MS" pitchFamily="34" charset="-122"/>
                 <a:cs typeface="Trebuchet MS" pitchFamily="34" charset="-120"/>
               </a:rPr>
-              <a:t>How to activate:</a:t>
+              <a:t>Local</a:t>
             </a:r>
             <a:endParaRPr lang="en-US" sz="1400" dirty="0"/>
           </a:p>
@@ -3173,14 +3182,14 @@
       </p:sp>
       <p:sp>
         <p:nvSpPr>
-          <p:cNvPr id="16" name="Text 14"/>
-          <p:cNvSpPr/>
-          <p:nvPr/>
-        </p:nvSpPr>
-        <p:spPr>
-          <a:xfrm>
-            <a:off x="640080" y="3703320"/>
-            <a:ext cx="3474720" cy="1097280"/>
+          <p:cNvPr id="20" name="Text 18"/>
+          <p:cNvSpPr/>
+          <p:nvPr/>
+        </p:nvSpPr>
+        <p:spPr>
+          <a:xfrm>
+            <a:off x="2560320" y="2185416"/>
+            <a:ext cx="3200400" cy="475488"/>
           </a:xfrm>
           <a:prstGeom prst="rect">
             <a:avLst/>
@@ -3192,101 +3201,139 @@
           <a:bodyPr wrap="square" lIns="0" tIns="0" rIns="0" bIns="0" rtlCol="0" anchor="ctr"/>
           <a:lstStyle/>
           <a:p>
-            <a:pPr marL="342900" indent="-342900">
-              <a:spcAft>
-                <a:spcPts val="300"/>
-              </a:spcAft>
-              <a:buSzPct val="100000"/>
-              <a:buChar char="•"/>
-            </a:pPr>
-            <a:r>
-              <a:rPr lang="en-US" sz="1100" dirty="0">
+            <a:pPr marL="0" indent="0">
+              <a:buNone/>
+            </a:pPr>
+            <a:r>
+              <a:rPr lang="en-US" sz="1200" dirty="0">
                 <a:solidFill>
                   <a:srgbClr val="1E293B"/>
+                </a:solidFill>
+                <a:latin typeface="Consolas" pitchFamily="34" charset="0"/>
+                <a:ea typeface="Consolas" pitchFamily="34" charset="-122"/>
+                <a:cs typeface="Consolas" pitchFamily="34" charset="-120"/>
+              </a:rPr>
+              <a:t>.claude/settings.local.json</a:t>
+            </a:r>
+            <a:endParaRPr lang="en-US" sz="1200" dirty="0"/>
+          </a:p>
+        </p:txBody>
+      </p:sp>
+      <p:sp>
+        <p:nvSpPr>
+          <p:cNvPr id="21" name="Text 19"/>
+          <p:cNvSpPr/>
+          <p:nvPr/>
+        </p:nvSpPr>
+        <p:spPr>
+          <a:xfrm>
+            <a:off x="5943600" y="2185416"/>
+            <a:ext cx="2560320" cy="475488"/>
+          </a:xfrm>
+          <a:prstGeom prst="rect">
+            <a:avLst/>
+          </a:prstGeom>
+          <a:noFill/>
+          <a:ln/>
+        </p:spPr>
+        <p:txBody>
+          <a:bodyPr wrap="square" lIns="0" tIns="0" rIns="0" bIns="0" rtlCol="0" anchor="ctr"/>
+          <a:lstStyle/>
+          <a:p>
+            <a:pPr marL="0" indent="0" algn="r">
+              <a:buNone/>
+            </a:pPr>
+            <a:r>
+              <a:rPr lang="en-US" sz="1100" i="1" dirty="0">
+                <a:solidFill>
+                  <a:srgbClr val="64748B"/>
                 </a:solidFill>
                 <a:latin typeface="Calibri" pitchFamily="34" charset="0"/>
                 <a:ea typeface="Calibri" pitchFamily="34" charset="-122"/>
                 <a:cs typeface="Calibri" pitchFamily="34" charset="-120"/>
               </a:rPr>
-              <a:t>Shift+Tab twice (cycles: Normal &gt; Auto-Accept &gt; Plan)</a:t>
+              <a:t>Personal, gitignored</a:t>
             </a:r>
             <a:endParaRPr lang="en-US" sz="1100" dirty="0"/>
           </a:p>
-          <a:p>
-            <a:pPr marL="342900" indent="-342900">
-              <a:spcAft>
-                <a:spcPts val="300"/>
-              </a:spcAft>
-              <a:buSzPct val="100000"/>
-              <a:buChar char="•"/>
-            </a:pPr>
-            <a:r>
-              <a:rPr lang="en-US" sz="1100" dirty="0">
-                <a:solidFill>
-                  <a:srgbClr val="1E293B"/>
-                </a:solidFill>
-                <a:latin typeface="Calibri" pitchFamily="34" charset="0"/>
-                <a:ea typeface="Calibri" pitchFamily="34" charset="-122"/>
-                <a:cs typeface="Calibri" pitchFamily="34" charset="-120"/>
-              </a:rPr>
-              <a:t>/plan command</a:t>
-            </a:r>
-            <a:endParaRPr lang="en-US" sz="1100" dirty="0"/>
-          </a:p>
-          <a:p>
-            <a:pPr marL="342900" indent="-342900">
-              <a:spcAft>
-                <a:spcPts val="300"/>
-              </a:spcAft>
-              <a:buSzPct val="100000"/>
-              <a:buChar char="•"/>
-            </a:pPr>
-            <a:r>
-              <a:rPr lang="en-US" sz="1100" dirty="0">
-                <a:solidFill>
-                  <a:srgbClr val="1E293B"/>
-                </a:solidFill>
-                <a:latin typeface="Calibri" pitchFamily="34" charset="0"/>
-                <a:ea typeface="Calibri" pitchFamily="34" charset="-122"/>
-                <a:cs typeface="Calibri" pitchFamily="34" charset="-120"/>
-              </a:rPr>
-              <a:t>--permission-mode plan flag</a:t>
-            </a:r>
-            <a:endParaRPr lang="en-US" sz="1100" dirty="0"/>
-          </a:p>
-          <a:p>
-            <a:pPr marL="342900" indent="-342900">
-              <a:spcAft>
-                <a:spcPts val="300"/>
-              </a:spcAft>
-              <a:buSzPct val="100000"/>
-              <a:buChar char="•"/>
-            </a:pPr>
-            <a:r>
-              <a:rPr lang="en-US" sz="1100" dirty="0">
-                <a:solidFill>
-                  <a:srgbClr val="1E293B"/>
-                </a:solidFill>
-                <a:latin typeface="Calibri" pitchFamily="34" charset="0"/>
-                <a:ea typeface="Calibri" pitchFamily="34" charset="-122"/>
-                <a:cs typeface="Calibri" pitchFamily="34" charset="-120"/>
-              </a:rPr>
-              <a:t>Set as default: "defaultMode": "plan" in settings</a:t>
-            </a:r>
-            <a:endParaRPr lang="en-US" sz="1100" dirty="0"/>
-          </a:p>
-        </p:txBody>
-      </p:sp>
-      <p:sp>
-        <p:nvSpPr>
-          <p:cNvPr id="17" name="Shape 15"/>
-          <p:cNvSpPr/>
-          <p:nvPr/>
-        </p:nvSpPr>
-        <p:spPr>
-          <a:xfrm>
-            <a:off x="4846320" y="3246120"/>
-            <a:ext cx="3840480" cy="1691640"/>
+        </p:txBody>
+      </p:sp>
+      <p:sp>
+        <p:nvSpPr>
+          <p:cNvPr id="22" name="Shape 20"/>
+          <p:cNvSpPr/>
+          <p:nvPr/>
+        </p:nvSpPr>
+        <p:spPr>
+          <a:xfrm>
+            <a:off x="548640" y="2798064"/>
+            <a:ext cx="411480" cy="411480"/>
+          </a:xfrm>
+          <a:prstGeom prst="ellipse">
+            <a:avLst/>
+          </a:prstGeom>
+          <a:solidFill>
+            <a:srgbClr val="10B981"/>
+          </a:solidFill>
+          <a:ln/>
+        </p:spPr>
+        <p:txBody>
+          <a:bodyPr/>
+          <a:lstStyle/>
+          <a:p>
+            <a:endParaRPr lang="en-US"/>
+          </a:p>
+        </p:txBody>
+      </p:sp>
+      <p:sp>
+        <p:nvSpPr>
+          <p:cNvPr id="23" name="Text 21"/>
+          <p:cNvSpPr/>
+          <p:nvPr/>
+        </p:nvSpPr>
+        <p:spPr>
+          <a:xfrm>
+            <a:off x="548640" y="2798064"/>
+            <a:ext cx="411480" cy="411480"/>
+          </a:xfrm>
+          <a:prstGeom prst="rect">
+            <a:avLst/>
+          </a:prstGeom>
+          <a:noFill/>
+          <a:ln/>
+        </p:spPr>
+        <p:txBody>
+          <a:bodyPr wrap="square" lIns="0" tIns="0" rIns="0" bIns="0" rtlCol="0" anchor="ctr"/>
+          <a:lstStyle/>
+          <a:p>
+            <a:pPr marL="0" indent="0" algn="ctr">
+              <a:buNone/>
+            </a:pPr>
+            <a:r>
+              <a:rPr lang="en-US" sz="1600" b="1" dirty="0">
+                <a:solidFill>
+                  <a:srgbClr val="FFFFFF"/>
+                </a:solidFill>
+                <a:latin typeface="Trebuchet MS" pitchFamily="34" charset="0"/>
+                <a:ea typeface="Trebuchet MS" pitchFamily="34" charset="-122"/>
+                <a:cs typeface="Trebuchet MS" pitchFamily="34" charset="-120"/>
+              </a:rPr>
+              <a:t>4</a:t>
+            </a:r>
+            <a:endParaRPr lang="en-US" sz="1600" dirty="0"/>
+          </a:p>
+        </p:txBody>
+      </p:sp>
+      <p:sp>
+        <p:nvSpPr>
+          <p:cNvPr id="24" name="Shape 22"/>
+          <p:cNvSpPr/>
+          <p:nvPr/>
+        </p:nvSpPr>
+        <p:spPr>
+          <a:xfrm>
+            <a:off x="1097280" y="2752344"/>
+            <a:ext cx="7498080" cy="475488"/>
           </a:xfrm>
           <a:prstGeom prst="rect">
             <a:avLst/>
@@ -3313,41 +3360,14 @@
       </p:sp>
       <p:sp>
         <p:nvSpPr>
-          <p:cNvPr id="18" name="Shape 16"/>
-          <p:cNvSpPr/>
-          <p:nvPr/>
-        </p:nvSpPr>
-        <p:spPr>
-          <a:xfrm>
-            <a:off x="4846320" y="3246120"/>
-            <a:ext cx="3840480" cy="54864"/>
-          </a:xfrm>
-          <a:prstGeom prst="rect">
-            <a:avLst/>
-          </a:prstGeom>
-          <a:solidFill>
-            <a:srgbClr val="8B5CF6"/>
-          </a:solidFill>
-          <a:ln/>
-        </p:spPr>
-        <p:txBody>
-          <a:bodyPr/>
-          <a:lstStyle/>
-          <a:p>
-            <a:endParaRPr lang="en-US"/>
-          </a:p>
-        </p:txBody>
-      </p:sp>
-      <p:sp>
-        <p:nvSpPr>
-          <p:cNvPr id="19" name="Text 17"/>
-          <p:cNvSpPr/>
-          <p:nvPr/>
-        </p:nvSpPr>
-        <p:spPr>
-          <a:xfrm>
-            <a:off x="5029200" y="3383280"/>
-            <a:ext cx="3474720" cy="274320"/>
+          <p:cNvPr id="25" name="Text 23"/>
+          <p:cNvSpPr/>
+          <p:nvPr/>
+        </p:nvSpPr>
+        <p:spPr>
+          <a:xfrm>
+            <a:off x="1280160" y="2752344"/>
+            <a:ext cx="1188720" cy="475488"/>
           </a:xfrm>
           <a:prstGeom prst="rect">
             <a:avLst/>
@@ -3365,13 +3385,13 @@
             <a:r>
               <a:rPr lang="en-US" sz="1400" b="1" dirty="0">
                 <a:solidFill>
-                  <a:srgbClr val="8B5CF6"/>
+                  <a:srgbClr val="10B981"/>
                 </a:solidFill>
                 <a:latin typeface="Trebuchet MS" pitchFamily="34" charset="0"/>
                 <a:ea typeface="Trebuchet MS" pitchFamily="34" charset="-122"/>
                 <a:cs typeface="Trebuchet MS" pitchFamily="34" charset="-120"/>
               </a:rPr>
-              <a:t>Recommended workflow:</a:t>
+              <a:t>Project</a:t>
             </a:r>
             <a:endParaRPr lang="en-US" sz="1400" dirty="0"/>
           </a:p>
@@ -3379,14 +3399,14 @@
       </p:sp>
       <p:sp>
         <p:nvSpPr>
-          <p:cNvPr id="20" name="Text 18"/>
-          <p:cNvSpPr/>
-          <p:nvPr/>
-        </p:nvSpPr>
-        <p:spPr>
-          <a:xfrm>
-            <a:off x="5029200" y="3703320"/>
-            <a:ext cx="3474720" cy="1097280"/>
+          <p:cNvPr id="26" name="Text 24"/>
+          <p:cNvSpPr/>
+          <p:nvPr/>
+        </p:nvSpPr>
+        <p:spPr>
+          <a:xfrm>
+            <a:off x="2560320" y="2752344"/>
+            <a:ext cx="3200400" cy="475488"/>
           </a:xfrm>
           <a:prstGeom prst="rect">
             <a:avLst/>
@@ -3399,53 +3419,348 @@
           <a:lstStyle/>
           <a:p>
             <a:pPr marL="0" indent="0">
-              <a:spcAft>
-                <a:spcPts val="300"/>
-              </a:spcAft>
               <a:buNone/>
             </a:pPr>
             <a:r>
-              <a:rPr lang="en-US" sz="1100" dirty="0">
+              <a:rPr lang="en-US" sz="1200" dirty="0">
                 <a:solidFill>
                   <a:srgbClr val="1E293B"/>
+                </a:solidFill>
+                <a:latin typeface="Consolas" pitchFamily="34" charset="0"/>
+                <a:ea typeface="Consolas" pitchFamily="34" charset="-122"/>
+                <a:cs typeface="Consolas" pitchFamily="34" charset="-120"/>
+              </a:rPr>
+              <a:t>.claude/settings.json</a:t>
+            </a:r>
+            <a:endParaRPr lang="en-US" sz="1200" dirty="0"/>
+          </a:p>
+        </p:txBody>
+      </p:sp>
+      <p:sp>
+        <p:nvSpPr>
+          <p:cNvPr id="27" name="Text 25"/>
+          <p:cNvSpPr/>
+          <p:nvPr/>
+        </p:nvSpPr>
+        <p:spPr>
+          <a:xfrm>
+            <a:off x="5943600" y="2752344"/>
+            <a:ext cx="2560320" cy="475488"/>
+          </a:xfrm>
+          <a:prstGeom prst="rect">
+            <a:avLst/>
+          </a:prstGeom>
+          <a:noFill/>
+          <a:ln/>
+        </p:spPr>
+        <p:txBody>
+          <a:bodyPr wrap="square" lIns="0" tIns="0" rIns="0" bIns="0" rtlCol="0" anchor="ctr"/>
+          <a:lstStyle/>
+          <a:p>
+            <a:pPr marL="0" indent="0" algn="r">
+              <a:buNone/>
+            </a:pPr>
+            <a:r>
+              <a:rPr lang="en-US" sz="1100" i="1" dirty="0">
+                <a:solidFill>
+                  <a:srgbClr val="64748B"/>
                 </a:solidFill>
                 <a:latin typeface="Calibri" pitchFamily="34" charset="0"/>
                 <a:ea typeface="Calibri" pitchFamily="34" charset="-122"/>
                 <a:cs typeface="Calibri" pitchFamily="34" charset="-120"/>
               </a:rPr>
-              <a:t>1. Start in Plan Mode — let Claude analyze and propose</a:t>
+              <a:t>Shared, committed</a:t>
             </a:r>
             <a:endParaRPr lang="en-US" sz="1100" dirty="0"/>
           </a:p>
+        </p:txBody>
+      </p:sp>
+      <p:sp>
+        <p:nvSpPr>
+          <p:cNvPr id="28" name="Shape 26"/>
+          <p:cNvSpPr/>
+          <p:nvPr/>
+        </p:nvSpPr>
+        <p:spPr>
+          <a:xfrm>
+            <a:off x="548640" y="3364992"/>
+            <a:ext cx="411480" cy="411480"/>
+          </a:xfrm>
+          <a:prstGeom prst="ellipse">
+            <a:avLst/>
+          </a:prstGeom>
+          <a:solidFill>
+            <a:srgbClr val="F59E0B"/>
+          </a:solidFill>
+          <a:ln/>
+        </p:spPr>
+        <p:txBody>
+          <a:bodyPr/>
+          <a:lstStyle/>
+          <a:p>
+            <a:endParaRPr lang="en-US"/>
+          </a:p>
+        </p:txBody>
+      </p:sp>
+      <p:sp>
+        <p:nvSpPr>
+          <p:cNvPr id="29" name="Text 27"/>
+          <p:cNvSpPr/>
+          <p:nvPr/>
+        </p:nvSpPr>
+        <p:spPr>
+          <a:xfrm>
+            <a:off x="548640" y="3364992"/>
+            <a:ext cx="411480" cy="411480"/>
+          </a:xfrm>
+          <a:prstGeom prst="rect">
+            <a:avLst/>
+          </a:prstGeom>
+          <a:noFill/>
+          <a:ln/>
+        </p:spPr>
+        <p:txBody>
+          <a:bodyPr wrap="square" lIns="0" tIns="0" rIns="0" bIns="0" rtlCol="0" anchor="ctr"/>
+          <a:lstStyle/>
+          <a:p>
+            <a:pPr marL="0" indent="0" algn="ctr">
+              <a:buNone/>
+            </a:pPr>
+            <a:r>
+              <a:rPr lang="en-US" sz="1600" b="1" dirty="0">
+                <a:solidFill>
+                  <a:srgbClr val="FFFFFF"/>
+                </a:solidFill>
+                <a:latin typeface="Trebuchet MS" pitchFamily="34" charset="0"/>
+                <a:ea typeface="Trebuchet MS" pitchFamily="34" charset="-122"/>
+                <a:cs typeface="Trebuchet MS" pitchFamily="34" charset="-120"/>
+              </a:rPr>
+              <a:t>5</a:t>
+            </a:r>
+            <a:endParaRPr lang="en-US" sz="1600" dirty="0"/>
+          </a:p>
+        </p:txBody>
+      </p:sp>
+      <p:sp>
+        <p:nvSpPr>
+          <p:cNvPr id="30" name="Shape 28"/>
+          <p:cNvSpPr/>
+          <p:nvPr/>
+        </p:nvSpPr>
+        <p:spPr>
+          <a:xfrm>
+            <a:off x="1097280" y="3319272"/>
+            <a:ext cx="7498080" cy="475488"/>
+          </a:xfrm>
+          <a:prstGeom prst="rect">
+            <a:avLst/>
+          </a:prstGeom>
+          <a:solidFill>
+            <a:srgbClr val="FFFFFF"/>
+          </a:solidFill>
+          <a:ln/>
+          <a:effectLst>
+            <a:outerShdw blurRad="101600" dist="25400" dir="8100000" algn="bl" rotWithShape="0">
+              <a:srgbClr val="000000">
+                <a:alpha val="8000"/>
+              </a:srgbClr>
+            </a:outerShdw>
+          </a:effectLst>
+        </p:spPr>
+        <p:txBody>
+          <a:bodyPr/>
+          <a:lstStyle/>
+          <a:p>
+            <a:endParaRPr lang="en-US"/>
+          </a:p>
+        </p:txBody>
+      </p:sp>
+      <p:sp>
+        <p:nvSpPr>
+          <p:cNvPr id="31" name="Text 29"/>
+          <p:cNvSpPr/>
+          <p:nvPr/>
+        </p:nvSpPr>
+        <p:spPr>
+          <a:xfrm>
+            <a:off x="1280160" y="3319272"/>
+            <a:ext cx="1188720" cy="475488"/>
+          </a:xfrm>
+          <a:prstGeom prst="rect">
+            <a:avLst/>
+          </a:prstGeom>
+          <a:noFill/>
+          <a:ln/>
+        </p:spPr>
+        <p:txBody>
+          <a:bodyPr wrap="square" lIns="0" tIns="0" rIns="0" bIns="0" rtlCol="0" anchor="ctr"/>
+          <a:lstStyle/>
           <a:p>
             <a:pPr marL="0" indent="0">
-              <a:spcAft>
-                <a:spcPts val="300"/>
-              </a:spcAft>
               <a:buNone/>
             </a:pPr>
             <a:r>
-              <a:rPr lang="en-US" sz="1100" dirty="0">
+              <a:rPr lang="en-US" sz="1400" b="1" dirty="0">
+                <a:solidFill>
+                  <a:srgbClr val="F59E0B"/>
+                </a:solidFill>
+                <a:latin typeface="Trebuchet MS" pitchFamily="34" charset="0"/>
+                <a:ea typeface="Trebuchet MS" pitchFamily="34" charset="-122"/>
+                <a:cs typeface="Trebuchet MS" pitchFamily="34" charset="-120"/>
+              </a:rPr>
+              <a:t>User</a:t>
+            </a:r>
+            <a:endParaRPr lang="en-US" sz="1400" dirty="0"/>
+          </a:p>
+        </p:txBody>
+      </p:sp>
+      <p:sp>
+        <p:nvSpPr>
+          <p:cNvPr id="32" name="Text 30"/>
+          <p:cNvSpPr/>
+          <p:nvPr/>
+        </p:nvSpPr>
+        <p:spPr>
+          <a:xfrm>
+            <a:off x="2560320" y="3319272"/>
+            <a:ext cx="3200400" cy="475488"/>
+          </a:xfrm>
+          <a:prstGeom prst="rect">
+            <a:avLst/>
+          </a:prstGeom>
+          <a:noFill/>
+          <a:ln/>
+        </p:spPr>
+        <p:txBody>
+          <a:bodyPr wrap="square" lIns="0" tIns="0" rIns="0" bIns="0" rtlCol="0" anchor="ctr"/>
+          <a:lstStyle/>
+          <a:p>
+            <a:pPr marL="0" indent="0">
+              <a:buNone/>
+            </a:pPr>
+            <a:r>
+              <a:rPr lang="en-US" sz="1200" dirty="0">
                 <a:solidFill>
                   <a:srgbClr val="1E293B"/>
+                </a:solidFill>
+                <a:latin typeface="Consolas" pitchFamily="34" charset="0"/>
+                <a:ea typeface="Consolas" pitchFamily="34" charset="-122"/>
+                <a:cs typeface="Consolas" pitchFamily="34" charset="-120"/>
+              </a:rPr>
+              <a:t>~/.claude/settings.json</a:t>
+            </a:r>
+            <a:endParaRPr lang="en-US" sz="1200" dirty="0"/>
+          </a:p>
+        </p:txBody>
+      </p:sp>
+      <p:sp>
+        <p:nvSpPr>
+          <p:cNvPr id="33" name="Text 31"/>
+          <p:cNvSpPr/>
+          <p:nvPr/>
+        </p:nvSpPr>
+        <p:spPr>
+          <a:xfrm>
+            <a:off x="5943600" y="3319272"/>
+            <a:ext cx="2560320" cy="475488"/>
+          </a:xfrm>
+          <a:prstGeom prst="rect">
+            <a:avLst/>
+          </a:prstGeom>
+          <a:noFill/>
+          <a:ln/>
+        </p:spPr>
+        <p:txBody>
+          <a:bodyPr wrap="square" lIns="0" tIns="0" rIns="0" bIns="0" rtlCol="0" anchor="ctr"/>
+          <a:lstStyle/>
+          <a:p>
+            <a:pPr marL="0" indent="0" algn="r">
+              <a:buNone/>
+            </a:pPr>
+            <a:r>
+              <a:rPr lang="en-US" sz="1100" i="1" dirty="0">
+                <a:solidFill>
+                  <a:srgbClr val="64748B"/>
                 </a:solidFill>
                 <a:latin typeface="Calibri" pitchFamily="34" charset="0"/>
                 <a:ea typeface="Calibri" pitchFamily="34" charset="-122"/>
                 <a:cs typeface="Calibri" pitchFamily="34" charset="-120"/>
               </a:rPr>
-              <a:t>2. Review the plan — edit if needed</a:t>
+              <a:t>Personal, all projects</a:t>
             </a:r>
             <a:endParaRPr lang="en-US" sz="1100" dirty="0"/>
           </a:p>
+        </p:txBody>
+      </p:sp>
+      <p:sp>
+        <p:nvSpPr>
+          <p:cNvPr id="34" name="Text 32"/>
+          <p:cNvSpPr/>
+          <p:nvPr/>
+        </p:nvSpPr>
+        <p:spPr>
+          <a:xfrm>
+            <a:off x="731520" y="4023360"/>
+            <a:ext cx="7680960" cy="320040"/>
+          </a:xfrm>
+          <a:prstGeom prst="rect">
+            <a:avLst/>
+          </a:prstGeom>
+          <a:noFill/>
+          <a:ln/>
+        </p:spPr>
+        <p:txBody>
+          <a:bodyPr wrap="square" lIns="0" tIns="0" rIns="0" bIns="0" rtlCol="0" anchor="ctr"/>
+          <a:lstStyle/>
           <a:p>
             <a:pPr marL="0" indent="0">
+              <a:buNone/>
+            </a:pPr>
+            <a:r>
+              <a:rPr lang="en-US" sz="1500" b="1" dirty="0">
+                <a:solidFill>
+                  <a:srgbClr val="1E293B"/>
+                </a:solidFill>
+                <a:latin typeface="Trebuchet MS" pitchFamily="34" charset="0"/>
+                <a:ea typeface="Trebuchet MS" pitchFamily="34" charset="-122"/>
+                <a:cs typeface="Trebuchet MS" pitchFamily="34" charset="-120"/>
+              </a:rPr>
+              <a:t>Key settings:</a:t>
+            </a:r>
+            <a:endParaRPr lang="en-US" sz="1500" dirty="0"/>
+          </a:p>
+        </p:txBody>
+      </p:sp>
+      <p:sp>
+        <p:nvSpPr>
+          <p:cNvPr id="35" name="Text 33"/>
+          <p:cNvSpPr/>
+          <p:nvPr/>
+        </p:nvSpPr>
+        <p:spPr>
+          <a:xfrm>
+            <a:off x="731520" y="4343400"/>
+            <a:ext cx="7680960" cy="731520"/>
+          </a:xfrm>
+          <a:prstGeom prst="rect">
+            <a:avLst/>
+          </a:prstGeom>
+          <a:noFill/>
+          <a:ln/>
+        </p:spPr>
+        <p:txBody>
+          <a:bodyPr wrap="square" lIns="0" tIns="0" rIns="0" bIns="0" rtlCol="0" anchor="ctr"/>
+          <a:lstStyle/>
+          <a:p>
+            <a:pPr marL="342900" indent="-342900">
               <a:spcAft>
-                <a:spcPts val="300"/>
+                <a:spcPts val="400"/>
               </a:spcAft>
-              <a:buNone/>
-            </a:pPr>
-            <a:r>
-              <a:rPr lang="en-US" sz="1100" dirty="0">
+              <a:buSzPct val="100000"/>
+              <a:buChar char="•"/>
+            </a:pPr>
+            <a:r>
+              <a:rPr lang="en-US" sz="1200" dirty="0">
                 <a:solidFill>
                   <a:srgbClr val="1E293B"/>
                 </a:solidFill>
@@ -3453,19 +3768,20 @@
                 <a:ea typeface="Calibri" pitchFamily="34" charset="-122"/>
                 <a:cs typeface="Calibri" pitchFamily="34" charset="-120"/>
               </a:rPr>
-              <a:t>3. Switch to Normal Mode — let Claude execute</a:t>
-            </a:r>
-            <a:endParaRPr lang="en-US" sz="1100" dirty="0"/>
-          </a:p>
-          <a:p>
-            <a:pPr marL="0" indent="0">
+              <a:t>permissions.allow / deny — what Claude can run without asking</a:t>
+            </a:r>
+            <a:endParaRPr lang="en-US" sz="1200" dirty="0"/>
+          </a:p>
+          <a:p>
+            <a:pPr marL="342900" indent="-342900">
               <a:spcAft>
-                <a:spcPts val="300"/>
+                <a:spcPts val="400"/>
               </a:spcAft>
-              <a:buNone/>
-            </a:pPr>
-            <a:r>
-              <a:rPr lang="en-US" sz="1100" dirty="0">
+              <a:buSzPct val="100000"/>
+              <a:buChar char="•"/>
+            </a:pPr>
+            <a:r>
+              <a:rPr lang="en-US" sz="1200" dirty="0">
                 <a:solidFill>
                   <a:srgbClr val="1E293B"/>
                 </a:solidFill>
@@ -3473,9 +3789,30 @@
                 <a:ea typeface="Calibri" pitchFamily="34" charset="-122"/>
                 <a:cs typeface="Calibri" pitchFamily="34" charset="-120"/>
               </a:rPr>
-              <a:t>4. Verify — run tests, review diffs</a:t>
-            </a:r>
-            <a:endParaRPr lang="en-US" sz="1100" dirty="0"/>
+              <a:t>defaultMode — start in plan/default/acceptEdits mode</a:t>
+            </a:r>
+            <a:endParaRPr lang="en-US" sz="1200" dirty="0"/>
+          </a:p>
+          <a:p>
+            <a:pPr marL="342900" indent="-342900">
+              <a:spcAft>
+                <a:spcPts val="400"/>
+              </a:spcAft>
+              <a:buSzPct val="100000"/>
+              <a:buChar char="•"/>
+            </a:pPr>
+            <a:r>
+              <a:rPr lang="en-US" sz="1200" dirty="0">
+                <a:solidFill>
+                  <a:srgbClr val="1E293B"/>
+                </a:solidFill>
+                <a:latin typeface="Calibri" pitchFamily="34" charset="0"/>
+                <a:ea typeface="Calibri" pitchFamily="34" charset="-122"/>
+                <a:cs typeface="Calibri" pitchFamily="34" charset="-120"/>
+              </a:rPr>
+              <a:t>model — override the default model</a:t>
+            </a:r>
+            <a:endParaRPr lang="en-US" sz="1200" dirty="0"/>
           </a:p>
         </p:txBody>
       </p:sp>
@@ -5752,7 +6089,7 @@
         </p:nvGraphicFramePr>
         <p:xfrm>
           <a:off x="457200" y="1097280"/>
-          <a:ext cx="8229600" cy="914400"/>
+          <a:ext cx="7315200" cy="2377440"/>
         </p:xfrm>
         <a:graphic>
           <a:graphicData uri="http://schemas.openxmlformats.org/drawingml/2006/table">
@@ -6916,7 +7253,7 @@
         </p:nvSpPr>
         <p:spPr>
           <a:xfrm>
-            <a:off x="731520" y="3474720"/>
+            <a:off x="523433" y="3647639"/>
             <a:ext cx="7680960" cy="320040"/>
           </a:xfrm>
           <a:prstGeom prst="rect">
@@ -8684,6 +9021,493 @@
 
 <file path=ppt/slides/slide6.xml><?xml version="1.0" encoding="utf-8"?>
 <p:sld xmlns:a="http://schemas.openxmlformats.org/drawingml/2006/main" xmlns:r="http://schemas.openxmlformats.org/officeDocument/2006/relationships" xmlns:p="http://schemas.openxmlformats.org/presentationml/2006/main">
+  <p:cSld name="Slide 9">
+    <p:bg>
+      <p:bgPr>
+        <a:solidFill>
+          <a:srgbClr val="F8FAFC"/>
+        </a:solidFill>
+        <a:effectLst/>
+      </p:bgPr>
+    </p:bg>
+    <p:spTree>
+      <p:nvGrpSpPr>
+        <p:cNvPr id="1" name=""/>
+        <p:cNvGrpSpPr/>
+        <p:nvPr/>
+      </p:nvGrpSpPr>
+      <p:grpSpPr>
+        <a:xfrm>
+          <a:off x="0" y="0"/>
+          <a:ext cx="0" cy="0"/>
+          <a:chOff x="0" y="0"/>
+          <a:chExt cx="0" cy="0"/>
+        </a:xfrm>
+      </p:grpSpPr>
+      <p:sp>
+        <p:nvSpPr>
+          <p:cNvPr id="2" name="Shape 0"/>
+          <p:cNvSpPr/>
+          <p:nvPr/>
+        </p:nvSpPr>
+        <p:spPr>
+          <a:xfrm>
+            <a:off x="0" y="0"/>
+            <a:ext cx="9144000" cy="822960"/>
+          </a:xfrm>
+          <a:prstGeom prst="rect">
+            <a:avLst/>
+          </a:prstGeom>
+          <a:solidFill>
+            <a:srgbClr val="0F172A"/>
+          </a:solidFill>
+          <a:ln/>
+        </p:spPr>
+        <p:txBody>
+          <a:bodyPr/>
+          <a:lstStyle/>
+          <a:p>
+            <a:endParaRPr lang="en-US"/>
+          </a:p>
+        </p:txBody>
+      </p:sp>
+      <p:sp>
+        <p:nvSpPr>
+          <p:cNvPr id="3" name="Text 1"/>
+          <p:cNvSpPr/>
+          <p:nvPr/>
+        </p:nvSpPr>
+        <p:spPr>
+          <a:xfrm>
+            <a:off x="731520" y="91440"/>
+            <a:ext cx="7680960" cy="640080"/>
+          </a:xfrm>
+          <a:prstGeom prst="rect">
+            <a:avLst/>
+          </a:prstGeom>
+          <a:noFill/>
+          <a:ln/>
+        </p:spPr>
+        <p:txBody>
+          <a:bodyPr wrap="square" lIns="0" tIns="0" rIns="0" bIns="0" rtlCol="0" anchor="ctr"/>
+          <a:lstStyle/>
+          <a:p>
+            <a:pPr marL="0" indent="0">
+              <a:buNone/>
+            </a:pPr>
+            <a:r>
+              <a:rPr lang="en-US" sz="2800" b="1" dirty="0">
+                <a:solidFill>
+                  <a:srgbClr val="FFFFFF"/>
+                </a:solidFill>
+                <a:latin typeface="Trebuchet MS" pitchFamily="34" charset="0"/>
+                <a:ea typeface="Trebuchet MS" pitchFamily="34" charset="-122"/>
+                <a:cs typeface="Trebuchet MS" pitchFamily="34" charset="-120"/>
+              </a:rPr>
+              <a:t>Research Mode</a:t>
+            </a:r>
+            <a:endParaRPr lang="en-US" sz="2800" dirty="0"/>
+          </a:p>
+        </p:txBody>
+      </p:sp>
+      <p:sp>
+        <p:nvSpPr>
+          <p:cNvPr id="4" name="Text 2"/>
+          <p:cNvSpPr/>
+          <p:nvPr/>
+        </p:nvSpPr>
+        <p:spPr>
+          <a:xfrm>
+            <a:off x="731520" y="1005840"/>
+            <a:ext cx="7680960" cy="365760"/>
+          </a:xfrm>
+          <a:prstGeom prst="rect">
+            <a:avLst/>
+          </a:prstGeom>
+          <a:noFill/>
+          <a:ln/>
+        </p:spPr>
+        <p:txBody>
+          <a:bodyPr wrap="square" lIns="0" tIns="0" rIns="0" bIns="0" rtlCol="0" anchor="ctr"/>
+          <a:lstStyle/>
+          <a:p>
+            <a:pPr marL="0" indent="0">
+              <a:buNone/>
+            </a:pPr>
+            <a:r>
+              <a:rPr lang="en-US" sz="1400" i="1" dirty="0">
+                <a:solidFill>
+                  <a:srgbClr val="64748B"/>
+                </a:solidFill>
+                <a:latin typeface="Calibri" pitchFamily="34" charset="0"/>
+                <a:ea typeface="Calibri" pitchFamily="34" charset="-122"/>
+                <a:cs typeface="Calibri" pitchFamily="34" charset="-120"/>
+              </a:rPr>
+              <a:t>Available in Claude Chat (web) — tells Claude to search the web before answering, then cite sources.</a:t>
+            </a:r>
+            <a:endParaRPr lang="en-US" sz="1400" dirty="0"/>
+          </a:p>
+        </p:txBody>
+      </p:sp>
+      <p:sp>
+        <p:nvSpPr>
+          <p:cNvPr id="5" name="Shape 3"/>
+          <p:cNvSpPr/>
+          <p:nvPr/>
+        </p:nvSpPr>
+        <p:spPr>
+          <a:xfrm>
+            <a:off x="457200" y="1554480"/>
+            <a:ext cx="3840480" cy="2377440"/>
+          </a:xfrm>
+          <a:prstGeom prst="rect">
+            <a:avLst/>
+          </a:prstGeom>
+          <a:solidFill>
+            <a:srgbClr val="FFFFFF"/>
+          </a:solidFill>
+          <a:ln/>
+          <a:effectLst>
+            <a:outerShdw blurRad="101600" dist="25400" dir="8100000" algn="bl" rotWithShape="0">
+              <a:srgbClr val="000000">
+                <a:alpha val="8000"/>
+              </a:srgbClr>
+            </a:outerShdw>
+          </a:effectLst>
+        </p:spPr>
+        <p:txBody>
+          <a:bodyPr/>
+          <a:lstStyle/>
+          <a:p>
+            <a:endParaRPr lang="en-US"/>
+          </a:p>
+        </p:txBody>
+      </p:sp>
+      <p:sp>
+        <p:nvSpPr>
+          <p:cNvPr id="6" name="Shape 4"/>
+          <p:cNvSpPr/>
+          <p:nvPr/>
+        </p:nvSpPr>
+        <p:spPr>
+          <a:xfrm>
+            <a:off x="457200" y="1554480"/>
+            <a:ext cx="3840480" cy="54864"/>
+          </a:xfrm>
+          <a:prstGeom prst="rect">
+            <a:avLst/>
+          </a:prstGeom>
+          <a:solidFill>
+            <a:srgbClr val="10B981"/>
+          </a:solidFill>
+          <a:ln/>
+        </p:spPr>
+        <p:txBody>
+          <a:bodyPr/>
+          <a:lstStyle/>
+          <a:p>
+            <a:endParaRPr lang="en-US"/>
+          </a:p>
+        </p:txBody>
+      </p:sp>
+      <p:sp>
+        <p:nvSpPr>
+          <p:cNvPr id="7" name="Text 5"/>
+          <p:cNvSpPr/>
+          <p:nvPr/>
+        </p:nvSpPr>
+        <p:spPr>
+          <a:xfrm>
+            <a:off x="640080" y="1737360"/>
+            <a:ext cx="3474720" cy="320040"/>
+          </a:xfrm>
+          <a:prstGeom prst="rect">
+            <a:avLst/>
+          </a:prstGeom>
+          <a:noFill/>
+          <a:ln/>
+        </p:spPr>
+        <p:txBody>
+          <a:bodyPr wrap="square" lIns="0" tIns="0" rIns="0" bIns="0" rtlCol="0" anchor="ctr"/>
+          <a:lstStyle/>
+          <a:p>
+            <a:pPr marL="0" indent="0">
+              <a:buNone/>
+            </a:pPr>
+            <a:r>
+              <a:rPr lang="en-US" sz="1500" b="1" dirty="0">
+                <a:solidFill>
+                  <a:srgbClr val="10B981"/>
+                </a:solidFill>
+                <a:latin typeface="Trebuchet MS" pitchFamily="34" charset="0"/>
+                <a:ea typeface="Trebuchet MS" pitchFamily="34" charset="-122"/>
+                <a:cs typeface="Trebuchet MS" pitchFamily="34" charset="-120"/>
+              </a:rPr>
+              <a:t>When to use it:</a:t>
+            </a:r>
+            <a:endParaRPr lang="en-US" sz="1500" dirty="0"/>
+          </a:p>
+        </p:txBody>
+      </p:sp>
+      <p:sp>
+        <p:nvSpPr>
+          <p:cNvPr id="8" name="Text 6"/>
+          <p:cNvSpPr/>
+          <p:nvPr/>
+        </p:nvSpPr>
+        <p:spPr>
+          <a:xfrm>
+            <a:off x="640080" y="2103120"/>
+            <a:ext cx="3474720" cy="1645920"/>
+          </a:xfrm>
+          <a:prstGeom prst="rect">
+            <a:avLst/>
+          </a:prstGeom>
+          <a:noFill/>
+          <a:ln/>
+        </p:spPr>
+        <p:txBody>
+          <a:bodyPr wrap="square" lIns="0" tIns="0" rIns="0" bIns="0" rtlCol="0" anchor="ctr"/>
+          <a:lstStyle/>
+          <a:p>
+            <a:pPr marL="342900" indent="-342900">
+              <a:spcAft>
+                <a:spcPts val="800"/>
+              </a:spcAft>
+              <a:buSzPct val="100000"/>
+              <a:buChar char="•"/>
+            </a:pPr>
+            <a:r>
+              <a:rPr lang="en-US" sz="1200" dirty="0">
+                <a:solidFill>
+                  <a:srgbClr val="1E293B"/>
+                </a:solidFill>
+                <a:latin typeface="Calibri" pitchFamily="34" charset="0"/>
+                <a:ea typeface="Calibri" pitchFamily="34" charset="-122"/>
+                <a:cs typeface="Calibri" pitchFamily="34" charset="-120"/>
+              </a:rPr>
+              <a:t>Evaluating a new library (e.g., "Django Ninja vs DRF?")</a:t>
+            </a:r>
+            <a:endParaRPr lang="en-US" sz="1200" dirty="0"/>
+          </a:p>
+          <a:p>
+            <a:pPr marL="342900" indent="-342900">
+              <a:spcAft>
+                <a:spcPts val="800"/>
+              </a:spcAft>
+              <a:buSzPct val="100000"/>
+              <a:buChar char="•"/>
+            </a:pPr>
+            <a:r>
+              <a:rPr lang="en-US" sz="1200" dirty="0">
+                <a:solidFill>
+                  <a:srgbClr val="1E293B"/>
+                </a:solidFill>
+                <a:latin typeface="Calibri" pitchFamily="34" charset="0"/>
+                <a:ea typeface="Calibri" pitchFamily="34" charset="-122"/>
+                <a:cs typeface="Calibri" pitchFamily="34" charset="-120"/>
+              </a:rPr>
+              <a:t>Checking for recent breaking changes in a dependency</a:t>
+            </a:r>
+            <a:endParaRPr lang="en-US" sz="1200" dirty="0"/>
+          </a:p>
+          <a:p>
+            <a:pPr marL="342900" indent="-342900">
+              <a:spcAft>
+                <a:spcPts val="800"/>
+              </a:spcAft>
+              <a:buSzPct val="100000"/>
+              <a:buChar char="•"/>
+            </a:pPr>
+            <a:r>
+              <a:rPr lang="en-US" sz="1200" dirty="0">
+                <a:solidFill>
+                  <a:srgbClr val="1E293B"/>
+                </a:solidFill>
+                <a:latin typeface="Calibri" pitchFamily="34" charset="0"/>
+                <a:ea typeface="Calibri" pitchFamily="34" charset="-122"/>
+                <a:cs typeface="Calibri" pitchFamily="34" charset="-120"/>
+              </a:rPr>
+              <a:t>Finding current best practices for a technology</a:t>
+            </a:r>
+            <a:endParaRPr lang="en-US" sz="1200" dirty="0"/>
+          </a:p>
+        </p:txBody>
+      </p:sp>
+      <p:sp>
+        <p:nvSpPr>
+          <p:cNvPr id="9" name="Shape 7"/>
+          <p:cNvSpPr/>
+          <p:nvPr/>
+        </p:nvSpPr>
+        <p:spPr>
+          <a:xfrm>
+            <a:off x="4846320" y="1554480"/>
+            <a:ext cx="3840480" cy="2377440"/>
+          </a:xfrm>
+          <a:prstGeom prst="rect">
+            <a:avLst/>
+          </a:prstGeom>
+          <a:solidFill>
+            <a:srgbClr val="FFFFFF"/>
+          </a:solidFill>
+          <a:ln/>
+          <a:effectLst>
+            <a:outerShdw blurRad="101600" dist="25400" dir="8100000" algn="bl" rotWithShape="0">
+              <a:srgbClr val="000000">
+                <a:alpha val="8000"/>
+              </a:srgbClr>
+            </a:outerShdw>
+          </a:effectLst>
+        </p:spPr>
+        <p:txBody>
+          <a:bodyPr/>
+          <a:lstStyle/>
+          <a:p>
+            <a:endParaRPr lang="en-US"/>
+          </a:p>
+        </p:txBody>
+      </p:sp>
+      <p:sp>
+        <p:nvSpPr>
+          <p:cNvPr id="10" name="Shape 8"/>
+          <p:cNvSpPr/>
+          <p:nvPr/>
+        </p:nvSpPr>
+        <p:spPr>
+          <a:xfrm>
+            <a:off x="4846320" y="1554480"/>
+            <a:ext cx="3840480" cy="54864"/>
+          </a:xfrm>
+          <a:prstGeom prst="rect">
+            <a:avLst/>
+          </a:prstGeom>
+          <a:solidFill>
+            <a:srgbClr val="EF4444"/>
+          </a:solidFill>
+          <a:ln/>
+        </p:spPr>
+        <p:txBody>
+          <a:bodyPr/>
+          <a:lstStyle/>
+          <a:p>
+            <a:endParaRPr lang="en-US"/>
+          </a:p>
+        </p:txBody>
+      </p:sp>
+      <p:sp>
+        <p:nvSpPr>
+          <p:cNvPr id="11" name="Text 9"/>
+          <p:cNvSpPr/>
+          <p:nvPr/>
+        </p:nvSpPr>
+        <p:spPr>
+          <a:xfrm>
+            <a:off x="5029200" y="1737360"/>
+            <a:ext cx="3474720" cy="320040"/>
+          </a:xfrm>
+          <a:prstGeom prst="rect">
+            <a:avLst/>
+          </a:prstGeom>
+          <a:noFill/>
+          <a:ln/>
+        </p:spPr>
+        <p:txBody>
+          <a:bodyPr wrap="square" lIns="0" tIns="0" rIns="0" bIns="0" rtlCol="0" anchor="ctr"/>
+          <a:lstStyle/>
+          <a:p>
+            <a:pPr marL="0" indent="0">
+              <a:buNone/>
+            </a:pPr>
+            <a:r>
+              <a:rPr lang="en-US" sz="1500" b="1" dirty="0">
+                <a:solidFill>
+                  <a:srgbClr val="EF4444"/>
+                </a:solidFill>
+                <a:latin typeface="Trebuchet MS" pitchFamily="34" charset="0"/>
+                <a:ea typeface="Trebuchet MS" pitchFamily="34" charset="-122"/>
+                <a:cs typeface="Trebuchet MS" pitchFamily="34" charset="-120"/>
+              </a:rPr>
+              <a:t>When NOT to use it:</a:t>
+            </a:r>
+            <a:endParaRPr lang="en-US" sz="1500" dirty="0"/>
+          </a:p>
+        </p:txBody>
+      </p:sp>
+      <p:sp>
+        <p:nvSpPr>
+          <p:cNvPr id="12" name="Text 10"/>
+          <p:cNvSpPr/>
+          <p:nvPr/>
+        </p:nvSpPr>
+        <p:spPr>
+          <a:xfrm>
+            <a:off x="5029200" y="2103120"/>
+            <a:ext cx="3474720" cy="1645920"/>
+          </a:xfrm>
+          <a:prstGeom prst="rect">
+            <a:avLst/>
+          </a:prstGeom>
+          <a:noFill/>
+          <a:ln/>
+        </p:spPr>
+        <p:txBody>
+          <a:bodyPr wrap="square" lIns="0" tIns="0" rIns="0" bIns="0" rtlCol="0" anchor="ctr"/>
+          <a:lstStyle/>
+          <a:p>
+            <a:pPr marL="342900" indent="-342900">
+              <a:spcAft>
+                <a:spcPts val="800"/>
+              </a:spcAft>
+              <a:buSzPct val="100000"/>
+              <a:buChar char="•"/>
+            </a:pPr>
+            <a:r>
+              <a:rPr lang="en-US" sz="1200" dirty="0">
+                <a:solidFill>
+                  <a:srgbClr val="1E293B"/>
+                </a:solidFill>
+                <a:latin typeface="Calibri" pitchFamily="34" charset="0"/>
+                <a:ea typeface="Calibri" pitchFamily="34" charset="-122"/>
+                <a:cs typeface="Calibri" pitchFamily="34" charset="-120"/>
+              </a:rPr>
+              <a:t>Questions about your own codebase (Claude Chat can't see it)</a:t>
+            </a:r>
+            <a:endParaRPr lang="en-US" sz="1200" dirty="0"/>
+          </a:p>
+          <a:p>
+            <a:pPr marL="342900" indent="-342900">
+              <a:spcAft>
+                <a:spcPts val="800"/>
+              </a:spcAft>
+              <a:buSzPct val="100000"/>
+              <a:buChar char="•"/>
+            </a:pPr>
+            <a:r>
+              <a:rPr lang="en-US" sz="1200" dirty="0">
+                <a:solidFill>
+                  <a:srgbClr val="1E293B"/>
+                </a:solidFill>
+                <a:latin typeface="Calibri" pitchFamily="34" charset="0"/>
+                <a:ea typeface="Calibri" pitchFamily="34" charset="-122"/>
+                <a:cs typeface="Calibri" pitchFamily="34" charset="-120"/>
+              </a:rPr>
+              <a:t>Simple coding tasks (it adds latency)</a:t>
+            </a:r>
+            <a:endParaRPr lang="en-US" sz="1200" dirty="0"/>
+          </a:p>
+        </p:txBody>
+      </p:sp>
+    </p:spTree>
+  </p:cSld>
+  <p:clrMapOvr>
+    <a:masterClrMapping/>
+  </p:clrMapOvr>
+</p:sld>
+</file>
+
+<file path=ppt/slides/slide7.xml><?xml version="1.0" encoding="utf-8"?>
+<p:sld xmlns:a="http://schemas.openxmlformats.org/drawingml/2006/main" xmlns:r="http://schemas.openxmlformats.org/officeDocument/2006/relationships" xmlns:p="http://schemas.openxmlformats.org/presentationml/2006/main">
   <p:cSld name="Slide 6">
     <p:bg>
       <p:bgPr>
@@ -9253,9 +10077,9 @@
 </p:sld>
 </file>
 
-<file path=ppt/slides/slide7.xml><?xml version="1.0" encoding="utf-8"?>
+<file path=ppt/slides/slide8.xml><?xml version="1.0" encoding="utf-8"?>
 <p:sld xmlns:a="http://schemas.openxmlformats.org/drawingml/2006/main" xmlns:r="http://schemas.openxmlformats.org/officeDocument/2006/relationships" xmlns:p="http://schemas.openxmlformats.org/presentationml/2006/main">
-  <p:cSld name="Slide 7">
+  <p:cSld name="Slide 10">
     <p:bg>
       <p:bgPr>
         <a:solidFill>
@@ -9330,7 +10154,7 @@
               <a:buNone/>
             </a:pPr>
             <a:r>
-              <a:rPr lang="en-US" sz="2600" b="1" dirty="0">
+              <a:rPr lang="en-US" sz="2800" b="1" dirty="0">
                 <a:solidFill>
                   <a:srgbClr val="FFFFFF"/>
                 </a:solidFill>
@@ -9338,9 +10162,9 @@
                 <a:ea typeface="Trebuchet MS" pitchFamily="34" charset="-122"/>
                 <a:cs typeface="Trebuchet MS" pitchFamily="34" charset="-120"/>
               </a:rPr>
-              <a:t>CLAUDE.md — Your Highest-Leverage File</a:t>
-            </a:r>
-            <a:endParaRPr lang="en-US" sz="2600" dirty="0"/>
+              <a:t>Extended Thinking</a:t>
+            </a:r>
+            <a:endParaRPr lang="en-US" sz="2800" dirty="0"/>
           </a:p>
         </p:txBody>
       </p:sp>
@@ -9377,7 +10201,7 @@
                 <a:ea typeface="Calibri" pitchFamily="34" charset="-122"/>
                 <a:cs typeface="Calibri" pitchFamily="34" charset="-120"/>
               </a:rPr>
-              <a:t>Think of it as: onboarding documentation for the AI, not for humans.</a:t>
+              <a:t>Claude can "think step by step" before answering, showing its reasoning process.</a:t>
             </a:r>
             <a:endParaRPr lang="en-US" sz="1400" dirty="0"/>
           </a:p>
@@ -9392,7 +10216,7 @@
         <p:spPr>
           <a:xfrm>
             <a:off x="457200" y="1508760"/>
-            <a:ext cx="3840480" cy="2743200"/>
+            <a:ext cx="2606040" cy="3291840"/>
           </a:xfrm>
           <a:prstGeom prst="rect">
             <a:avLst/>
@@ -9426,13 +10250,13 @@
         <p:spPr>
           <a:xfrm>
             <a:off x="457200" y="1508760"/>
-            <a:ext cx="3840480" cy="54864"/>
+            <a:ext cx="2606040" cy="54864"/>
           </a:xfrm>
           <a:prstGeom prst="rect">
             <a:avLst/>
           </a:prstGeom>
           <a:solidFill>
-            <a:srgbClr val="10B981"/>
+            <a:srgbClr val="0EA5E9"/>
           </a:solidFill>
           <a:ln/>
         </p:spPr>
@@ -9453,7 +10277,7 @@
         <p:spPr>
           <a:xfrm>
             <a:off x="640080" y="1691640"/>
-            <a:ext cx="3474720" cy="320040"/>
+            <a:ext cx="2240280" cy="365760"/>
           </a:xfrm>
           <a:prstGeom prst="rect">
             <a:avLst/>
@@ -9469,17 +10293,17 @@
               <a:buNone/>
             </a:pPr>
             <a:r>
-              <a:rPr lang="en-US" sz="1500" b="1" dirty="0">
-                <a:solidFill>
-                  <a:srgbClr val="10B981"/>
+              <a:rPr lang="en-US" sz="1600" b="1" dirty="0">
+                <a:solidFill>
+                  <a:srgbClr val="0EA5E9"/>
                 </a:solidFill>
                 <a:latin typeface="Trebuchet MS" pitchFamily="34" charset="0"/>
                 <a:ea typeface="Trebuchet MS" pitchFamily="34" charset="-122"/>
                 <a:cs typeface="Trebuchet MS" pitchFamily="34" charset="-120"/>
               </a:rPr>
-              <a:t>What to include (~50-80 lines):</a:t>
-            </a:r>
-            <a:endParaRPr lang="en-US" sz="1500" dirty="0"/>
+              <a:t>How it works</a:t>
+            </a:r>
+            <a:endParaRPr lang="en-US" sz="1600" dirty="0"/>
           </a:p>
         </p:txBody>
       </p:sp>
@@ -9491,8 +10315,8 @@
         </p:nvSpPr>
         <p:spPr>
           <a:xfrm>
-            <a:off x="640080" y="2057400"/>
-            <a:ext cx="3474720" cy="2011680"/>
+            <a:off x="640080" y="2148840"/>
+            <a:ext cx="2240280" cy="2468880"/>
           </a:xfrm>
           <a:prstGeom prst="rect">
             <a:avLst/>
@@ -9506,7 +10330,7 @@
           <a:p>
             <a:pPr marL="342900" indent="-342900">
               <a:spcAft>
-                <a:spcPts val="400"/>
+                <a:spcPts val="800"/>
               </a:spcAft>
               <a:buSzPct val="100000"/>
               <a:buChar char="•"/>
@@ -9520,14 +10344,14 @@
                 <a:ea typeface="Calibri" pitchFamily="34" charset="-122"/>
                 <a:cs typeface="Calibri" pitchFamily="34" charset="-120"/>
               </a:rPr>
-              <a:t>One-line project description</a:t>
+              <a:t>Generates internal reasoning tokens before visible response</a:t>
             </a:r>
             <a:endParaRPr lang="en-US" sz="1200" dirty="0"/>
           </a:p>
           <a:p>
             <a:pPr marL="342900" indent="-342900">
               <a:spcAft>
-                <a:spcPts val="400"/>
+                <a:spcPts val="800"/>
               </a:spcAft>
               <a:buSzPct val="100000"/>
               <a:buChar char="•"/>
@@ -9541,14 +10365,14 @@
                 <a:ea typeface="Calibri" pitchFamily="34" charset="-122"/>
                 <a:cs typeface="Calibri" pitchFamily="34" charset="-120"/>
               </a:rPr>
-              <a:t>Tech stack (exact versions matter)</a:t>
+              <a:t>Enable with alwaysThinkingEnabled: true in settings</a:t>
             </a:r>
             <a:endParaRPr lang="en-US" sz="1200" dirty="0"/>
           </a:p>
           <a:p>
             <a:pPr marL="342900" indent="-342900">
               <a:spcAft>
-                <a:spcPts val="400"/>
+                <a:spcPts val="800"/>
               </a:spcAft>
               <a:buSzPct val="100000"/>
               <a:buChar char="•"/>
@@ -9562,73 +10386,10 @@
                 <a:ea typeface="Calibri" pitchFamily="34" charset="-122"/>
                 <a:cs typeface="Calibri" pitchFamily="34" charset="-120"/>
               </a:rPr>
-              <a:t>Build, test, and lint commands</a:t>
+              <a:t>Opus engages deep reasoning automatically</a:t>
             </a:r>
             <a:endParaRPr lang="en-US" sz="1200" dirty="0"/>
           </a:p>
-          <a:p>
-            <a:pPr marL="342900" indent="-342900">
-              <a:spcAft>
-                <a:spcPts val="400"/>
-              </a:spcAft>
-              <a:buSzPct val="100000"/>
-              <a:buChar char="•"/>
-            </a:pPr>
-            <a:r>
-              <a:rPr lang="en-US" sz="1200" dirty="0">
-                <a:solidFill>
-                  <a:srgbClr val="1E293B"/>
-                </a:solidFill>
-                <a:latin typeface="Calibri" pitchFamily="34" charset="0"/>
-                <a:ea typeface="Calibri" pitchFamily="34" charset="-122"/>
-                <a:cs typeface="Calibri" pitchFamily="34" charset="-120"/>
-              </a:rPr>
-              <a:t>Architecture overview (app structure, key patterns)</a:t>
-            </a:r>
-            <a:endParaRPr lang="en-US" sz="1200" dirty="0"/>
-          </a:p>
-          <a:p>
-            <a:pPr marL="342900" indent="-342900">
-              <a:spcAft>
-                <a:spcPts val="400"/>
-              </a:spcAft>
-              <a:buSzPct val="100000"/>
-              <a:buChar char="•"/>
-            </a:pPr>
-            <a:r>
-              <a:rPr lang="en-US" sz="1200" dirty="0">
-                <a:solidFill>
-                  <a:srgbClr val="1E293B"/>
-                </a:solidFill>
-                <a:latin typeface="Calibri" pitchFamily="34" charset="0"/>
-                <a:ea typeface="Calibri" pitchFamily="34" charset="-122"/>
-                <a:cs typeface="Calibri" pitchFamily="34" charset="-120"/>
-              </a:rPr>
-              <a:t>Important relationships and gotchas</a:t>
-            </a:r>
-            <a:endParaRPr lang="en-US" sz="1200" dirty="0"/>
-          </a:p>
-          <a:p>
-            <a:pPr marL="342900" indent="-342900">
-              <a:spcAft>
-                <a:spcPts val="400"/>
-              </a:spcAft>
-              <a:buSzPct val="100000"/>
-              <a:buChar char="•"/>
-            </a:pPr>
-            <a:r>
-              <a:rPr lang="en-US" sz="1200" dirty="0">
-                <a:solidFill>
-                  <a:srgbClr val="1E293B"/>
-                </a:solidFill>
-                <a:latin typeface="Calibri" pitchFamily="34" charset="0"/>
-                <a:ea typeface="Calibri" pitchFamily="34" charset="-122"/>
-                <a:cs typeface="Calibri" pitchFamily="34" charset="-120"/>
-              </a:rPr>
-              <a:t>What NOT to do (critical constraints)</a:t>
-            </a:r>
-            <a:endParaRPr lang="en-US" sz="1200" dirty="0"/>
-          </a:p>
         </p:txBody>
       </p:sp>
       <p:sp>
@@ -9639,8 +10400,8 @@
         </p:nvSpPr>
         <p:spPr>
           <a:xfrm>
-            <a:off x="4846320" y="1508760"/>
-            <a:ext cx="3840480" cy="2743200"/>
+            <a:off x="3291840" y="1508760"/>
+            <a:ext cx="2606040" cy="3291840"/>
           </a:xfrm>
           <a:prstGeom prst="rect">
             <a:avLst/>
@@ -9673,14 +10434,14 @@
         </p:nvSpPr>
         <p:spPr>
           <a:xfrm>
-            <a:off x="4846320" y="1508760"/>
-            <a:ext cx="3840480" cy="54864"/>
+            <a:off x="3291840" y="1508760"/>
+            <a:ext cx="2606040" cy="54864"/>
           </a:xfrm>
           <a:prstGeom prst="rect">
             <a:avLst/>
           </a:prstGeom>
           <a:solidFill>
-            <a:srgbClr val="EF4444"/>
+            <a:srgbClr val="0D9488"/>
           </a:solidFill>
           <a:ln/>
         </p:spPr>
@@ -9700,8 +10461,8 @@
         </p:nvSpPr>
         <p:spPr>
           <a:xfrm>
-            <a:off x="5029200" y="1691640"/>
-            <a:ext cx="3474720" cy="320040"/>
+            <a:off x="3474720" y="1691640"/>
+            <a:ext cx="2240280" cy="365760"/>
           </a:xfrm>
           <a:prstGeom prst="rect">
             <a:avLst/>
@@ -9717,17 +10478,17 @@
               <a:buNone/>
             </a:pPr>
             <a:r>
-              <a:rPr lang="en-US" sz="1500" b="1" dirty="0">
-                <a:solidFill>
-                  <a:srgbClr val="EF4444"/>
+              <a:rPr lang="en-US" sz="1600" b="1" dirty="0">
+                <a:solidFill>
+                  <a:srgbClr val="0D9488"/>
                 </a:solidFill>
                 <a:latin typeface="Trebuchet MS" pitchFamily="34" charset="0"/>
                 <a:ea typeface="Trebuchet MS" pitchFamily="34" charset="-122"/>
                 <a:cs typeface="Trebuchet MS" pitchFamily="34" charset="-120"/>
               </a:rPr>
-              <a:t>What NOT to include:</a:t>
-            </a:r>
-            <a:endParaRPr lang="en-US" sz="1500" dirty="0"/>
+              <a:t>When it helps</a:t>
+            </a:r>
+            <a:endParaRPr lang="en-US" sz="1600" dirty="0"/>
           </a:p>
         </p:txBody>
       </p:sp>
@@ -9739,8 +10500,8 @@
         </p:nvSpPr>
         <p:spPr>
           <a:xfrm>
-            <a:off x="5029200" y="2057400"/>
-            <a:ext cx="3474720" cy="2011680"/>
+            <a:off x="3474720" y="2148840"/>
+            <a:ext cx="2240280" cy="2468880"/>
           </a:xfrm>
           <a:prstGeom prst="rect">
             <a:avLst/>
@@ -9754,7 +10515,7 @@
           <a:p>
             <a:pPr marL="342900" indent="-342900">
               <a:spcAft>
-                <a:spcPts val="400"/>
+                <a:spcPts val="800"/>
               </a:spcAft>
               <a:buSzPct val="100000"/>
               <a:buChar char="•"/>
@@ -9768,14 +10529,14 @@
                 <a:ea typeface="Calibri" pitchFamily="34" charset="-122"/>
                 <a:cs typeface="Calibri" pitchFamily="34" charset="-120"/>
               </a:rPr>
-              <a:t>Generic instructions ("write clean code")</a:t>
+              <a:t>Debugging complex issues with multiple possible causes</a:t>
             </a:r>
             <a:endParaRPr lang="en-US" sz="1200" dirty="0"/>
           </a:p>
           <a:p>
             <a:pPr marL="342900" indent="-342900">
               <a:spcAft>
-                <a:spcPts val="400"/>
+                <a:spcPts val="800"/>
               </a:spcAft>
               <a:buSzPct val="100000"/>
               <a:buChar char="•"/>
@@ -9789,14 +10550,14 @@
                 <a:ea typeface="Calibri" pitchFamily="34" charset="-122"/>
                 <a:cs typeface="Calibri" pitchFamily="34" charset="-120"/>
               </a:rPr>
-              <a:t>Formatting rules — use linters instead</a:t>
+              <a:t>Planning a multi-step refactor</a:t>
             </a:r>
             <a:endParaRPr lang="en-US" sz="1200" dirty="0"/>
           </a:p>
           <a:p>
             <a:pPr marL="342900" indent="-342900">
               <a:spcAft>
-                <a:spcPts val="400"/>
+                <a:spcPts val="800"/>
               </a:spcAft>
               <a:buSzPct val="100000"/>
               <a:buChar char="•"/>
@@ -9810,7 +10571,7 @@
                 <a:ea typeface="Calibri" pitchFamily="34" charset="-122"/>
                 <a:cs typeface="Calibri" pitchFamily="34" charset="-120"/>
               </a:rPr>
-              <a:t>Everything — keep it lean (~150-200 instructions max)</a:t>
+              <a:t>Understanding unfamiliar code with complex logic</a:t>
             </a:r>
             <a:endParaRPr lang="en-US" sz="1200" dirty="0"/>
           </a:p>
@@ -9824,16 +10585,23 @@
         </p:nvSpPr>
         <p:spPr>
           <a:xfrm>
-            <a:off x="457200" y="4434840"/>
-            <a:ext cx="8229600" cy="502920"/>
+            <a:off x="6126480" y="1508760"/>
+            <a:ext cx="2606040" cy="3291840"/>
           </a:xfrm>
           <a:prstGeom prst="rect">
             <a:avLst/>
           </a:prstGeom>
           <a:solidFill>
-            <a:srgbClr val="0F172A"/>
+            <a:srgbClr val="FFFFFF"/>
           </a:solidFill>
           <a:ln/>
+          <a:effectLst>
+            <a:outerShdw blurRad="101600" dist="25400" dir="8100000" algn="bl" rotWithShape="0">
+              <a:srgbClr val="000000">
+                <a:alpha val="8000"/>
+              </a:srgbClr>
+            </a:outerShdw>
+          </a:effectLst>
         </p:spPr>
         <p:txBody>
           <a:bodyPr/>
@@ -9845,14 +10613,41 @@
       </p:sp>
       <p:sp>
         <p:nvSpPr>
-          <p:cNvPr id="14" name="Text 12"/>
-          <p:cNvSpPr/>
-          <p:nvPr/>
-        </p:nvSpPr>
-        <p:spPr>
-          <a:xfrm>
-            <a:off x="731520" y="4434840"/>
-            <a:ext cx="7772400" cy="502920"/>
+          <p:cNvPr id="14" name="Shape 12"/>
+          <p:cNvSpPr/>
+          <p:nvPr/>
+        </p:nvSpPr>
+        <p:spPr>
+          <a:xfrm>
+            <a:off x="6126480" y="1508760"/>
+            <a:ext cx="2606040" cy="54864"/>
+          </a:xfrm>
+          <a:prstGeom prst="rect">
+            <a:avLst/>
+          </a:prstGeom>
+          <a:solidFill>
+            <a:srgbClr val="F59E0B"/>
+          </a:solidFill>
+          <a:ln/>
+        </p:spPr>
+        <p:txBody>
+          <a:bodyPr/>
+          <a:lstStyle/>
+          <a:p>
+            <a:endParaRPr lang="en-US"/>
+          </a:p>
+        </p:txBody>
+      </p:sp>
+      <p:sp>
+        <p:nvSpPr>
+          <p:cNvPr id="15" name="Text 13"/>
+          <p:cNvSpPr/>
+          <p:nvPr/>
+        </p:nvSpPr>
+        <p:spPr>
+          <a:xfrm>
+            <a:off x="6309360" y="1691640"/>
+            <a:ext cx="2240280" cy="365760"/>
           </a:xfrm>
           <a:prstGeom prst="rect">
             <a:avLst/>
@@ -9868,39 +10663,102 @@
               <a:buNone/>
             </a:pPr>
             <a:r>
-              <a:rPr lang="en-US" sz="1300" b="1" dirty="0">
-                <a:solidFill>
-                  <a:srgbClr val="0EA5E9"/>
+              <a:rPr lang="en-US" sz="1600" b="1" dirty="0">
+                <a:solidFill>
+                  <a:srgbClr val="F59E0B"/>
+                </a:solidFill>
+                <a:latin typeface="Trebuchet MS" pitchFamily="34" charset="0"/>
+                <a:ea typeface="Trebuchet MS" pitchFamily="34" charset="-122"/>
+                <a:cs typeface="Trebuchet MS" pitchFamily="34" charset="-120"/>
+              </a:rPr>
+              <a:t>Trade-off</a:t>
+            </a:r>
+            <a:endParaRPr lang="en-US" sz="1600" dirty="0"/>
+          </a:p>
+        </p:txBody>
+      </p:sp>
+      <p:sp>
+        <p:nvSpPr>
+          <p:cNvPr id="16" name="Text 14"/>
+          <p:cNvSpPr/>
+          <p:nvPr/>
+        </p:nvSpPr>
+        <p:spPr>
+          <a:xfrm>
+            <a:off x="6309360" y="2148840"/>
+            <a:ext cx="2240280" cy="2468880"/>
+          </a:xfrm>
+          <a:prstGeom prst="rect">
+            <a:avLst/>
+          </a:prstGeom>
+          <a:noFill/>
+          <a:ln/>
+        </p:spPr>
+        <p:txBody>
+          <a:bodyPr wrap="square" lIns="0" tIns="0" rIns="0" bIns="0" rtlCol="0" anchor="ctr"/>
+          <a:lstStyle/>
+          <a:p>
+            <a:pPr marL="342900" indent="-342900">
+              <a:spcAft>
+                <a:spcPts val="800"/>
+              </a:spcAft>
+              <a:buSzPct val="100000"/>
+              <a:buChar char="•"/>
+            </a:pPr>
+            <a:r>
+              <a:rPr lang="en-US" sz="1200" dirty="0">
+                <a:solidFill>
+                  <a:srgbClr val="1E293B"/>
                 </a:solidFill>
                 <a:latin typeface="Calibri" pitchFamily="34" charset="0"/>
                 <a:ea typeface="Calibri" pitchFamily="34" charset="-122"/>
                 <a:cs typeface="Calibri" pitchFamily="34" charset="-120"/>
               </a:rPr>
-              <a:t>Hierarchy:  </a:t>
-            </a:r>
-            <a:r>
-              <a:rPr lang="en-US" sz="1300" dirty="0">
-                <a:solidFill>
-                  <a:srgbClr val="FFFFFF"/>
+              <a:t>More thinking = better answers</a:t>
+            </a:r>
+            <a:endParaRPr lang="en-US" sz="1200" dirty="0"/>
+          </a:p>
+          <a:p>
+            <a:pPr marL="342900" indent="-342900">
+              <a:spcAft>
+                <a:spcPts val="800"/>
+              </a:spcAft>
+              <a:buSzPct val="100000"/>
+              <a:buChar char="•"/>
+            </a:pPr>
+            <a:r>
+              <a:rPr lang="en-US" sz="1200" dirty="0">
+                <a:solidFill>
+                  <a:srgbClr val="1E293B"/>
                 </a:solidFill>
                 <a:latin typeface="Calibri" pitchFamily="34" charset="0"/>
                 <a:ea typeface="Calibri" pitchFamily="34" charset="-122"/>
                 <a:cs typeface="Calibri" pitchFamily="34" charset="-120"/>
               </a:rPr>
-              <a:t>managed  &gt;  command-line  &gt;  local  &gt;  project  &gt;  user</a:t>
-            </a:r>
-            <a:r>
-              <a:rPr lang="en-US" sz="1300" i="1" dirty="0">
-                <a:solidFill>
-                  <a:srgbClr val="64748B"/>
+              <a:t>But more tokens and longer wait</a:t>
+            </a:r>
+            <a:endParaRPr lang="en-US" sz="1200" dirty="0"/>
+          </a:p>
+          <a:p>
+            <a:pPr marL="342900" indent="-342900">
+              <a:spcAft>
+                <a:spcPts val="800"/>
+              </a:spcAft>
+              <a:buSzPct val="100000"/>
+              <a:buChar char="•"/>
+            </a:pPr>
+            <a:r>
+              <a:rPr lang="en-US" sz="1200" dirty="0">
+                <a:solidFill>
+                  <a:srgbClr val="1E293B"/>
                 </a:solidFill>
                 <a:latin typeface="Calibri" pitchFamily="34" charset="0"/>
                 <a:ea typeface="Calibri" pitchFamily="34" charset="-122"/>
                 <a:cs typeface="Calibri" pitchFamily="34" charset="-120"/>
               </a:rPr>
-              <a:t>    (More specific always wins)</a:t>
-            </a:r>
-            <a:endParaRPr lang="en-US" sz="1300" dirty="0"/>
+              <a:t>For quick tasks, it's overhead</a:t>
+            </a:r>
+            <a:endParaRPr lang="en-US" sz="1200" dirty="0"/>
           </a:p>
         </p:txBody>
       </p:sp>
@@ -9912,9 +10770,9 @@
 </p:sld>
 </file>
 
-<file path=ppt/slides/slide8.xml><?xml version="1.0" encoding="utf-8"?>
+<file path=ppt/slides/slide9.xml><?xml version="1.0" encoding="utf-8"?>
 <p:sld xmlns:a="http://schemas.openxmlformats.org/drawingml/2006/main" xmlns:r="http://schemas.openxmlformats.org/officeDocument/2006/relationships" xmlns:p="http://schemas.openxmlformats.org/presentationml/2006/main">
-  <p:cSld name="Slide 8">
+  <p:cSld name="Slide 11">
     <p:bg>
       <p:bgPr>
         <a:solidFill>
@@ -9989,7 +10847,7 @@
               <a:buNone/>
             </a:pPr>
             <a:r>
-              <a:rPr lang="en-US" sz="2600" b="1" dirty="0">
+              <a:rPr lang="en-US" sz="2800" b="1" dirty="0">
                 <a:solidFill>
                   <a:srgbClr val="FFFFFF"/>
                 </a:solidFill>
@@ -9997,49 +10855,22 @@
                 <a:ea typeface="Trebuchet MS" pitchFamily="34" charset="-122"/>
                 <a:cs typeface="Trebuchet MS" pitchFamily="34" charset="-120"/>
               </a:rPr>
-              <a:t>The settings.json 5-Tier Hierarchy</a:t>
-            </a:r>
-            <a:endParaRPr lang="en-US" sz="2600" dirty="0"/>
-          </a:p>
-        </p:txBody>
-      </p:sp>
-      <p:sp>
-        <p:nvSpPr>
-          <p:cNvPr id="4" name="Shape 2"/>
-          <p:cNvSpPr/>
-          <p:nvPr/>
-        </p:nvSpPr>
-        <p:spPr>
-          <a:xfrm>
-            <a:off x="548640" y="1097280"/>
-            <a:ext cx="411480" cy="411480"/>
-          </a:xfrm>
-          <a:prstGeom prst="ellipse">
-            <a:avLst/>
-          </a:prstGeom>
-          <a:solidFill>
-            <a:srgbClr val="8B5CF6"/>
-          </a:solidFill>
-          <a:ln/>
-        </p:spPr>
-        <p:txBody>
-          <a:bodyPr/>
-          <a:lstStyle/>
-          <a:p>
-            <a:endParaRPr lang="en-US"/>
-          </a:p>
-        </p:txBody>
-      </p:sp>
-      <p:sp>
-        <p:nvSpPr>
-          <p:cNvPr id="5" name="Text 3"/>
-          <p:cNvSpPr/>
-          <p:nvPr/>
-        </p:nvSpPr>
-        <p:spPr>
-          <a:xfrm>
-            <a:off x="548640" y="1097280"/>
-            <a:ext cx="411480" cy="411480"/>
+              <a:t>Plan Mode — Your Safety Net</a:t>
+            </a:r>
+            <a:endParaRPr lang="en-US" sz="2800" dirty="0"/>
+          </a:p>
+        </p:txBody>
+      </p:sp>
+      <p:sp>
+        <p:nvSpPr>
+          <p:cNvPr id="4" name="Text 2"/>
+          <p:cNvSpPr/>
+          <p:nvPr/>
+        </p:nvSpPr>
+        <p:spPr>
+          <a:xfrm>
+            <a:off x="731520" y="960120"/>
+            <a:ext cx="7680960" cy="320040"/>
           </a:xfrm>
           <a:prstGeom prst="rect">
             <a:avLst/>
@@ -10051,34 +10882,34 @@
           <a:bodyPr wrap="square" lIns="0" tIns="0" rIns="0" bIns="0" rtlCol="0" anchor="ctr"/>
           <a:lstStyle/>
           <a:p>
-            <a:pPr marL="0" indent="0" algn="ctr">
+            <a:pPr marL="0" indent="0">
               <a:buNone/>
             </a:pPr>
             <a:r>
-              <a:rPr lang="en-US" sz="1600" b="1" dirty="0">
-                <a:solidFill>
-                  <a:srgbClr val="FFFFFF"/>
-                </a:solidFill>
-                <a:latin typeface="Trebuchet MS" pitchFamily="34" charset="0"/>
-                <a:ea typeface="Trebuchet MS" pitchFamily="34" charset="-122"/>
-                <a:cs typeface="Trebuchet MS" pitchFamily="34" charset="-120"/>
-              </a:rPr>
-              <a:t>1</a:t>
-            </a:r>
-            <a:endParaRPr lang="en-US" sz="1600" dirty="0"/>
-          </a:p>
-        </p:txBody>
-      </p:sp>
-      <p:sp>
-        <p:nvSpPr>
-          <p:cNvPr id="6" name="Shape 4"/>
-          <p:cNvSpPr/>
-          <p:nvPr/>
-        </p:nvSpPr>
-        <p:spPr>
-          <a:xfrm>
-            <a:off x="1097280" y="1051560"/>
-            <a:ext cx="7498080" cy="475488"/>
+              <a:rPr lang="en-US" sz="1400" i="1" dirty="0">
+                <a:solidFill>
+                  <a:srgbClr val="64748B"/>
+                </a:solidFill>
+                <a:latin typeface="Calibri" pitchFamily="34" charset="0"/>
+                <a:ea typeface="Calibri" pitchFamily="34" charset="-122"/>
+                <a:cs typeface="Calibri" pitchFamily="34" charset="-120"/>
+              </a:rPr>
+              <a:t>Restricts Claude to read-only operations. No file edits, no commands.</a:t>
+            </a:r>
+            <a:endParaRPr lang="en-US" sz="1400" dirty="0"/>
+          </a:p>
+        </p:txBody>
+      </p:sp>
+      <p:sp>
+        <p:nvSpPr>
+          <p:cNvPr id="5" name="Shape 3"/>
+          <p:cNvSpPr/>
+          <p:nvPr/>
+        </p:nvSpPr>
+        <p:spPr>
+          <a:xfrm>
+            <a:off x="457200" y="1417320"/>
+            <a:ext cx="3840480" cy="1645920"/>
           </a:xfrm>
           <a:prstGeom prst="rect">
             <a:avLst/>
@@ -10105,14 +10936,41 @@
       </p:sp>
       <p:sp>
         <p:nvSpPr>
+          <p:cNvPr id="6" name="Shape 4"/>
+          <p:cNvSpPr/>
+          <p:nvPr/>
+        </p:nvSpPr>
+        <p:spPr>
+          <a:xfrm>
+            <a:off x="457200" y="1417320"/>
+            <a:ext cx="3840480" cy="54864"/>
+          </a:xfrm>
+          <a:prstGeom prst="rect">
+            <a:avLst/>
+          </a:prstGeom>
+          <a:solidFill>
+            <a:srgbClr val="10B981"/>
+          </a:solidFill>
+          <a:ln/>
+        </p:spPr>
+        <p:txBody>
+          <a:bodyPr/>
+          <a:lstStyle/>
+          <a:p>
+            <a:endParaRPr lang="en-US"/>
+          </a:p>
+        </p:txBody>
+      </p:sp>
+      <p:sp>
+        <p:nvSpPr>
           <p:cNvPr id="7" name="Text 5"/>
           <p:cNvSpPr/>
           <p:nvPr/>
         </p:nvSpPr>
         <p:spPr>
           <a:xfrm>
-            <a:off x="1280160" y="1051560"/>
-            <a:ext cx="1188720" cy="475488"/>
+            <a:off x="640080" y="1554480"/>
+            <a:ext cx="3474720" cy="274320"/>
           </a:xfrm>
           <a:prstGeom prst="rect">
             <a:avLst/>
@@ -10130,13 +10988,13 @@
             <a:r>
               <a:rPr lang="en-US" sz="1400" b="1" dirty="0">
                 <a:solidFill>
-                  <a:srgbClr val="8B5CF6"/>
+                  <a:srgbClr val="10B981"/>
                 </a:solidFill>
                 <a:latin typeface="Trebuchet MS" pitchFamily="34" charset="0"/>
                 <a:ea typeface="Trebuchet MS" pitchFamily="34" charset="-122"/>
                 <a:cs typeface="Trebuchet MS" pitchFamily="34" charset="-120"/>
               </a:rPr>
-              <a:t>Managed</a:t>
+              <a:t>CAN do in Plan Mode:</a:t>
             </a:r>
             <a:endParaRPr lang="en-US" sz="1400" dirty="0"/>
           </a:p>
@@ -10150,8 +11008,8 @@
         </p:nvSpPr>
         <p:spPr>
           <a:xfrm>
-            <a:off x="2560320" y="1051560"/>
-            <a:ext cx="3200400" cy="475488"/>
+            <a:off x="640080" y="1874520"/>
+            <a:ext cx="3474720" cy="1097280"/>
           </a:xfrm>
           <a:prstGeom prst="rect">
             <a:avLst/>
@@ -10163,139 +11021,101 @@
           <a:bodyPr wrap="square" lIns="0" tIns="0" rIns="0" bIns="0" rtlCol="0" anchor="ctr"/>
           <a:lstStyle/>
           <a:p>
-            <a:pPr marL="0" indent="0">
-              <a:buNone/>
-            </a:pPr>
-            <a:r>
-              <a:rPr lang="en-US" sz="1200" dirty="0">
+            <a:pPr marL="342900" indent="-342900">
+              <a:spcAft>
+                <a:spcPts val="300"/>
+              </a:spcAft>
+              <a:buSzPct val="100000"/>
+              <a:buChar char="•"/>
+            </a:pPr>
+            <a:r>
+              <a:rPr lang="en-US" sz="1100" dirty="0">
                 <a:solidFill>
                   <a:srgbClr val="1E293B"/>
-                </a:solidFill>
-                <a:latin typeface="Consolas" pitchFamily="34" charset="0"/>
-                <a:ea typeface="Consolas" pitchFamily="34" charset="-122"/>
-                <a:cs typeface="Consolas" pitchFamily="34" charset="-120"/>
-              </a:rPr>
-              <a:t>/etc/claude-code/</a:t>
-            </a:r>
-            <a:endParaRPr lang="en-US" sz="1200" dirty="0"/>
-          </a:p>
-        </p:txBody>
-      </p:sp>
-      <p:sp>
-        <p:nvSpPr>
-          <p:cNvPr id="9" name="Text 7"/>
-          <p:cNvSpPr/>
-          <p:nvPr/>
-        </p:nvSpPr>
-        <p:spPr>
-          <a:xfrm>
-            <a:off x="5943600" y="1051560"/>
-            <a:ext cx="2560320" cy="475488"/>
-          </a:xfrm>
-          <a:prstGeom prst="rect">
-            <a:avLst/>
-          </a:prstGeom>
-          <a:noFill/>
-          <a:ln/>
-        </p:spPr>
-        <p:txBody>
-          <a:bodyPr wrap="square" lIns="0" tIns="0" rIns="0" bIns="0" rtlCol="0" anchor="ctr"/>
-          <a:lstStyle/>
-          <a:p>
-            <a:pPr marL="0" indent="0" algn="r">
-              <a:buNone/>
-            </a:pPr>
-            <a:r>
-              <a:rPr lang="en-US" sz="1100" i="1" dirty="0">
-                <a:solidFill>
-                  <a:srgbClr val="64748B"/>
                 </a:solidFill>
                 <a:latin typeface="Calibri" pitchFamily="34" charset="0"/>
                 <a:ea typeface="Calibri" pitchFamily="34" charset="-122"/>
                 <a:cs typeface="Calibri" pitchFamily="34" charset="-120"/>
               </a:rPr>
-              <a:t>IT-deployed, highest priority</a:t>
+              <a:t>Read files (Read, Glob, Grep)</a:t>
             </a:r>
             <a:endParaRPr lang="en-US" sz="1100" dirty="0"/>
           </a:p>
-        </p:txBody>
-      </p:sp>
-      <p:sp>
-        <p:nvSpPr>
-          <p:cNvPr id="10" name="Shape 8"/>
-          <p:cNvSpPr/>
-          <p:nvPr/>
-        </p:nvSpPr>
-        <p:spPr>
-          <a:xfrm>
-            <a:off x="548640" y="1664208"/>
-            <a:ext cx="411480" cy="411480"/>
-          </a:xfrm>
-          <a:prstGeom prst="ellipse">
-            <a:avLst/>
-          </a:prstGeom>
-          <a:solidFill>
-            <a:srgbClr val="0EA5E9"/>
-          </a:solidFill>
-          <a:ln/>
-        </p:spPr>
-        <p:txBody>
-          <a:bodyPr/>
-          <a:lstStyle/>
-          <a:p>
-            <a:endParaRPr lang="en-US"/>
-          </a:p>
-        </p:txBody>
-      </p:sp>
-      <p:sp>
-        <p:nvSpPr>
-          <p:cNvPr id="11" name="Text 9"/>
-          <p:cNvSpPr/>
-          <p:nvPr/>
-        </p:nvSpPr>
-        <p:spPr>
-          <a:xfrm>
-            <a:off x="548640" y="1664208"/>
-            <a:ext cx="411480" cy="411480"/>
-          </a:xfrm>
-          <a:prstGeom prst="rect">
-            <a:avLst/>
-          </a:prstGeom>
-          <a:noFill/>
-          <a:ln/>
-        </p:spPr>
-        <p:txBody>
-          <a:bodyPr wrap="square" lIns="0" tIns="0" rIns="0" bIns="0" rtlCol="0" anchor="ctr"/>
-          <a:lstStyle/>
-          <a:p>
-            <a:pPr marL="0" indent="0" algn="ctr">
-              <a:buNone/>
-            </a:pPr>
-            <a:r>
-              <a:rPr lang="en-US" sz="1600" b="1" dirty="0">
-                <a:solidFill>
-                  <a:srgbClr val="FFFFFF"/>
-                </a:solidFill>
-                <a:latin typeface="Trebuchet MS" pitchFamily="34" charset="0"/>
-                <a:ea typeface="Trebuchet MS" pitchFamily="34" charset="-122"/>
-                <a:cs typeface="Trebuchet MS" pitchFamily="34" charset="-120"/>
-              </a:rPr>
-              <a:t>2</a:t>
-            </a:r>
-            <a:endParaRPr lang="en-US" sz="1600" dirty="0"/>
-          </a:p>
-        </p:txBody>
-      </p:sp>
-      <p:sp>
-        <p:nvSpPr>
-          <p:cNvPr id="12" name="Shape 10"/>
-          <p:cNvSpPr/>
-          <p:nvPr/>
-        </p:nvSpPr>
-        <p:spPr>
-          <a:xfrm>
-            <a:off x="1097280" y="1618488"/>
-            <a:ext cx="7498080" cy="475488"/>
+          <a:p>
+            <a:pPr marL="342900" indent="-342900">
+              <a:spcAft>
+                <a:spcPts val="300"/>
+              </a:spcAft>
+              <a:buSzPct val="100000"/>
+              <a:buChar char="•"/>
+            </a:pPr>
+            <a:r>
+              <a:rPr lang="en-US" sz="1100" dirty="0">
+                <a:solidFill>
+                  <a:srgbClr val="1E293B"/>
+                </a:solidFill>
+                <a:latin typeface="Calibri" pitchFamily="34" charset="0"/>
+                <a:ea typeface="Calibri" pitchFamily="34" charset="-122"/>
+                <a:cs typeface="Calibri" pitchFamily="34" charset="-120"/>
+              </a:rPr>
+              <a:t>Search the web (WebSearch, WebFetch)</a:t>
+            </a:r>
+            <a:endParaRPr lang="en-US" sz="1100" dirty="0"/>
+          </a:p>
+          <a:p>
+            <a:pPr marL="342900" indent="-342900">
+              <a:spcAft>
+                <a:spcPts val="300"/>
+              </a:spcAft>
+              <a:buSzPct val="100000"/>
+              <a:buChar char="•"/>
+            </a:pPr>
+            <a:r>
+              <a:rPr lang="en-US" sz="1100" dirty="0">
+                <a:solidFill>
+                  <a:srgbClr val="1E293B"/>
+                </a:solidFill>
+                <a:latin typeface="Calibri" pitchFamily="34" charset="0"/>
+                <a:ea typeface="Calibri" pitchFamily="34" charset="-122"/>
+                <a:cs typeface="Calibri" pitchFamily="34" charset="-120"/>
+              </a:rPr>
+              <a:t>Spawn research sub-agents</a:t>
+            </a:r>
+            <a:endParaRPr lang="en-US" sz="1100" dirty="0"/>
+          </a:p>
+          <a:p>
+            <a:pPr marL="342900" indent="-342900">
+              <a:spcAft>
+                <a:spcPts val="300"/>
+              </a:spcAft>
+              <a:buSzPct val="100000"/>
+              <a:buChar char="•"/>
+            </a:pPr>
+            <a:r>
+              <a:rPr lang="en-US" sz="1100" dirty="0">
+                <a:solidFill>
+                  <a:srgbClr val="1E293B"/>
+                </a:solidFill>
+                <a:latin typeface="Calibri" pitchFamily="34" charset="0"/>
+                <a:ea typeface="Calibri" pitchFamily="34" charset="-122"/>
+                <a:cs typeface="Calibri" pitchFamily="34" charset="-120"/>
+              </a:rPr>
+              <a:t>Write a plan and present it for approval</a:t>
+            </a:r>
+            <a:endParaRPr lang="en-US" sz="1100" dirty="0"/>
+          </a:p>
+        </p:txBody>
+      </p:sp>
+      <p:sp>
+        <p:nvSpPr>
+          <p:cNvPr id="9" name="Shape 7"/>
+          <p:cNvSpPr/>
+          <p:nvPr/>
+        </p:nvSpPr>
+        <p:spPr>
+          <a:xfrm>
+            <a:off x="4846320" y="1417320"/>
+            <a:ext cx="3840480" cy="1645920"/>
           </a:xfrm>
           <a:prstGeom prst="rect">
             <a:avLst/>
@@ -10322,14 +11142,41 @@
       </p:sp>
       <p:sp>
         <p:nvSpPr>
-          <p:cNvPr id="13" name="Text 11"/>
-          <p:cNvSpPr/>
-          <p:nvPr/>
-        </p:nvSpPr>
-        <p:spPr>
-          <a:xfrm>
-            <a:off x="1280160" y="1618488"/>
-            <a:ext cx="1188720" cy="475488"/>
+          <p:cNvPr id="10" name="Shape 8"/>
+          <p:cNvSpPr/>
+          <p:nvPr/>
+        </p:nvSpPr>
+        <p:spPr>
+          <a:xfrm>
+            <a:off x="4846320" y="1417320"/>
+            <a:ext cx="3840480" cy="54864"/>
+          </a:xfrm>
+          <a:prstGeom prst="rect">
+            <a:avLst/>
+          </a:prstGeom>
+          <a:solidFill>
+            <a:srgbClr val="EF4444"/>
+          </a:solidFill>
+          <a:ln/>
+        </p:spPr>
+        <p:txBody>
+          <a:bodyPr/>
+          <a:lstStyle/>
+          <a:p>
+            <a:endParaRPr lang="en-US"/>
+          </a:p>
+        </p:txBody>
+      </p:sp>
+      <p:sp>
+        <p:nvSpPr>
+          <p:cNvPr id="11" name="Text 9"/>
+          <p:cNvSpPr/>
+          <p:nvPr/>
+        </p:nvSpPr>
+        <p:spPr>
+          <a:xfrm>
+            <a:off x="5029200" y="1554480"/>
+            <a:ext cx="3474720" cy="274320"/>
           </a:xfrm>
           <a:prstGeom prst="rect">
             <a:avLst/>
@@ -10347,13 +11194,13 @@
             <a:r>
               <a:rPr lang="en-US" sz="1400" b="1" dirty="0">
                 <a:solidFill>
-                  <a:srgbClr val="0EA5E9"/>
+                  <a:srgbClr val="EF4444"/>
                 </a:solidFill>
                 <a:latin typeface="Trebuchet MS" pitchFamily="34" charset="0"/>
                 <a:ea typeface="Trebuchet MS" pitchFamily="34" charset="-122"/>
                 <a:cs typeface="Trebuchet MS" pitchFamily="34" charset="-120"/>
               </a:rPr>
-              <a:t>CLI</a:t>
+              <a:t>CANNOT do in Plan Mode:</a:t>
             </a:r>
             <a:endParaRPr lang="en-US" sz="1400" dirty="0"/>
           </a:p>
@@ -10361,14 +11208,14 @@
       </p:sp>
       <p:sp>
         <p:nvSpPr>
-          <p:cNvPr id="14" name="Text 12"/>
-          <p:cNvSpPr/>
-          <p:nvPr/>
-        </p:nvSpPr>
-        <p:spPr>
-          <a:xfrm>
-            <a:off x="2560320" y="1618488"/>
-            <a:ext cx="3200400" cy="475488"/>
+          <p:cNvPr id="12" name="Text 10"/>
+          <p:cNvSpPr/>
+          <p:nvPr/>
+        </p:nvSpPr>
+        <p:spPr>
+          <a:xfrm>
+            <a:off x="5029200" y="1874520"/>
+            <a:ext cx="3474720" cy="1097280"/>
           </a:xfrm>
           <a:prstGeom prst="rect">
             <a:avLst/>
@@ -10380,139 +11227,80 @@
           <a:bodyPr wrap="square" lIns="0" tIns="0" rIns="0" bIns="0" rtlCol="0" anchor="ctr"/>
           <a:lstStyle/>
           <a:p>
-            <a:pPr marL="0" indent="0">
-              <a:buNone/>
-            </a:pPr>
-            <a:r>
-              <a:rPr lang="en-US" sz="1200" dirty="0">
+            <a:pPr marL="342900" indent="-342900">
+              <a:spcAft>
+                <a:spcPts val="300"/>
+              </a:spcAft>
+              <a:buSzPct val="100000"/>
+              <a:buChar char="•"/>
+            </a:pPr>
+            <a:r>
+              <a:rPr lang="en-US" sz="1100" dirty="0">
                 <a:solidFill>
                   <a:srgbClr val="1E293B"/>
-                </a:solidFill>
-                <a:latin typeface="Consolas" pitchFamily="34" charset="0"/>
-                <a:ea typeface="Consolas" pitchFamily="34" charset="-122"/>
-                <a:cs typeface="Consolas" pitchFamily="34" charset="-120"/>
-              </a:rPr>
-              <a:t>--settings flag</a:t>
-            </a:r>
-            <a:endParaRPr lang="en-US" sz="1200" dirty="0"/>
-          </a:p>
-        </p:txBody>
-      </p:sp>
-      <p:sp>
-        <p:nvSpPr>
-          <p:cNvPr id="15" name="Text 13"/>
-          <p:cNvSpPr/>
-          <p:nvPr/>
-        </p:nvSpPr>
-        <p:spPr>
-          <a:xfrm>
-            <a:off x="5943600" y="1618488"/>
-            <a:ext cx="2560320" cy="475488"/>
-          </a:xfrm>
-          <a:prstGeom prst="rect">
-            <a:avLst/>
-          </a:prstGeom>
-          <a:noFill/>
-          <a:ln/>
-        </p:spPr>
-        <p:txBody>
-          <a:bodyPr wrap="square" lIns="0" tIns="0" rIns="0" bIns="0" rtlCol="0" anchor="ctr"/>
-          <a:lstStyle/>
-          <a:p>
-            <a:pPr marL="0" indent="0" algn="r">
-              <a:buNone/>
-            </a:pPr>
-            <a:r>
-              <a:rPr lang="en-US" sz="1100" i="1" dirty="0">
-                <a:solidFill>
-                  <a:srgbClr val="64748B"/>
                 </a:solidFill>
                 <a:latin typeface="Calibri" pitchFamily="34" charset="0"/>
                 <a:ea typeface="Calibri" pitchFamily="34" charset="-122"/>
                 <a:cs typeface="Calibri" pitchFamily="34" charset="-120"/>
               </a:rPr>
-              <a:t>Session only</a:t>
+              <a:t>Edit or create files</a:t>
             </a:r>
             <a:endParaRPr lang="en-US" sz="1100" dirty="0"/>
           </a:p>
-        </p:txBody>
-      </p:sp>
-      <p:sp>
-        <p:nvSpPr>
-          <p:cNvPr id="16" name="Shape 14"/>
-          <p:cNvSpPr/>
-          <p:nvPr/>
-        </p:nvSpPr>
-        <p:spPr>
-          <a:xfrm>
-            <a:off x="548640" y="2231136"/>
-            <a:ext cx="411480" cy="411480"/>
-          </a:xfrm>
-          <a:prstGeom prst="ellipse">
-            <a:avLst/>
-          </a:prstGeom>
-          <a:solidFill>
-            <a:srgbClr val="0D9488"/>
-          </a:solidFill>
-          <a:ln/>
-        </p:spPr>
-        <p:txBody>
-          <a:bodyPr/>
-          <a:lstStyle/>
-          <a:p>
-            <a:endParaRPr lang="en-US"/>
-          </a:p>
-        </p:txBody>
-      </p:sp>
-      <p:sp>
-        <p:nvSpPr>
-          <p:cNvPr id="17" name="Text 15"/>
-          <p:cNvSpPr/>
-          <p:nvPr/>
-        </p:nvSpPr>
-        <p:spPr>
-          <a:xfrm>
-            <a:off x="548640" y="2231136"/>
-            <a:ext cx="411480" cy="411480"/>
-          </a:xfrm>
-          <a:prstGeom prst="rect">
-            <a:avLst/>
-          </a:prstGeom>
-          <a:noFill/>
-          <a:ln/>
-        </p:spPr>
-        <p:txBody>
-          <a:bodyPr wrap="square" lIns="0" tIns="0" rIns="0" bIns="0" rtlCol="0" anchor="ctr"/>
-          <a:lstStyle/>
-          <a:p>
-            <a:pPr marL="0" indent="0" algn="ctr">
-              <a:buNone/>
-            </a:pPr>
-            <a:r>
-              <a:rPr lang="en-US" sz="1600" b="1" dirty="0">
-                <a:solidFill>
-                  <a:srgbClr val="FFFFFF"/>
-                </a:solidFill>
-                <a:latin typeface="Trebuchet MS" pitchFamily="34" charset="0"/>
-                <a:ea typeface="Trebuchet MS" pitchFamily="34" charset="-122"/>
-                <a:cs typeface="Trebuchet MS" pitchFamily="34" charset="-120"/>
-              </a:rPr>
-              <a:t>3</a:t>
-            </a:r>
-            <a:endParaRPr lang="en-US" sz="1600" dirty="0"/>
-          </a:p>
-        </p:txBody>
-      </p:sp>
-      <p:sp>
-        <p:nvSpPr>
-          <p:cNvPr id="18" name="Shape 16"/>
-          <p:cNvSpPr/>
-          <p:nvPr/>
-        </p:nvSpPr>
-        <p:spPr>
-          <a:xfrm>
-            <a:off x="1097280" y="2185416"/>
-            <a:ext cx="7498080" cy="475488"/>
+          <a:p>
+            <a:pPr marL="342900" indent="-342900">
+              <a:spcAft>
+                <a:spcPts val="300"/>
+              </a:spcAft>
+              <a:buSzPct val="100000"/>
+              <a:buChar char="•"/>
+            </a:pPr>
+            <a:r>
+              <a:rPr lang="en-US" sz="1100" dirty="0">
+                <a:solidFill>
+                  <a:srgbClr val="1E293B"/>
+                </a:solidFill>
+                <a:latin typeface="Calibri" pitchFamily="34" charset="0"/>
+                <a:ea typeface="Calibri" pitchFamily="34" charset="-122"/>
+                <a:cs typeface="Calibri" pitchFamily="34" charset="-120"/>
+              </a:rPr>
+              <a:t>Run shell commands</a:t>
+            </a:r>
+            <a:endParaRPr lang="en-US" sz="1100" dirty="0"/>
+          </a:p>
+          <a:p>
+            <a:pPr marL="342900" indent="-342900">
+              <a:spcAft>
+                <a:spcPts val="300"/>
+              </a:spcAft>
+              <a:buSzPct val="100000"/>
+              <a:buChar char="•"/>
+            </a:pPr>
+            <a:r>
+              <a:rPr lang="en-US" sz="1100" dirty="0">
+                <a:solidFill>
+                  <a:srgbClr val="1E293B"/>
+                </a:solidFill>
+                <a:latin typeface="Calibri" pitchFamily="34" charset="0"/>
+                <a:ea typeface="Calibri" pitchFamily="34" charset="-122"/>
+                <a:cs typeface="Calibri" pitchFamily="34" charset="-120"/>
+              </a:rPr>
+              <a:t>Make any changes to your project</a:t>
+            </a:r>
+            <a:endParaRPr lang="en-US" sz="1100" dirty="0"/>
+          </a:p>
+        </p:txBody>
+      </p:sp>
+      <p:sp>
+        <p:nvSpPr>
+          <p:cNvPr id="13" name="Shape 11"/>
+          <p:cNvSpPr/>
+          <p:nvPr/>
+        </p:nvSpPr>
+        <p:spPr>
+          <a:xfrm>
+            <a:off x="457200" y="3246120"/>
+            <a:ext cx="3840480" cy="1691640"/>
           </a:xfrm>
           <a:prstGeom prst="rect">
             <a:avLst/>
@@ -10539,14 +11327,41 @@
       </p:sp>
       <p:sp>
         <p:nvSpPr>
-          <p:cNvPr id="19" name="Text 17"/>
-          <p:cNvSpPr/>
-          <p:nvPr/>
-        </p:nvSpPr>
-        <p:spPr>
-          <a:xfrm>
-            <a:off x="1280160" y="2185416"/>
-            <a:ext cx="1188720" cy="475488"/>
+          <p:cNvPr id="14" name="Shape 12"/>
+          <p:cNvSpPr/>
+          <p:nvPr/>
+        </p:nvSpPr>
+        <p:spPr>
+          <a:xfrm>
+            <a:off x="457200" y="3246120"/>
+            <a:ext cx="3840480" cy="54864"/>
+          </a:xfrm>
+          <a:prstGeom prst="rect">
+            <a:avLst/>
+          </a:prstGeom>
+          <a:solidFill>
+            <a:srgbClr val="0EA5E9"/>
+          </a:solidFill>
+          <a:ln/>
+        </p:spPr>
+        <p:txBody>
+          <a:bodyPr/>
+          <a:lstStyle/>
+          <a:p>
+            <a:endParaRPr lang="en-US"/>
+          </a:p>
+        </p:txBody>
+      </p:sp>
+      <p:sp>
+        <p:nvSpPr>
+          <p:cNvPr id="15" name="Text 13"/>
+          <p:cNvSpPr/>
+          <p:nvPr/>
+        </p:nvSpPr>
+        <p:spPr>
+          <a:xfrm>
+            <a:off x="640080" y="3383280"/>
+            <a:ext cx="3474720" cy="274320"/>
           </a:xfrm>
           <a:prstGeom prst="rect">
             <a:avLst/>
@@ -10564,13 +11379,13 @@
             <a:r>
               <a:rPr lang="en-US" sz="1400" b="1" dirty="0">
                 <a:solidFill>
-                  <a:srgbClr val="0D9488"/>
+                  <a:srgbClr val="0EA5E9"/>
                 </a:solidFill>
                 <a:latin typeface="Trebuchet MS" pitchFamily="34" charset="0"/>
                 <a:ea typeface="Trebuchet MS" pitchFamily="34" charset="-122"/>
                 <a:cs typeface="Trebuchet MS" pitchFamily="34" charset="-120"/>
               </a:rPr>
-              <a:t>Local</a:t>
+              <a:t>How to activate:</a:t>
             </a:r>
             <a:endParaRPr lang="en-US" sz="1400" dirty="0"/>
           </a:p>
@@ -10578,14 +11393,14 @@
       </p:sp>
       <p:sp>
         <p:nvSpPr>
-          <p:cNvPr id="20" name="Text 18"/>
-          <p:cNvSpPr/>
-          <p:nvPr/>
-        </p:nvSpPr>
-        <p:spPr>
-          <a:xfrm>
-            <a:off x="2560320" y="2185416"/>
-            <a:ext cx="3200400" cy="475488"/>
+          <p:cNvPr id="16" name="Text 14"/>
+          <p:cNvSpPr/>
+          <p:nvPr/>
+        </p:nvSpPr>
+        <p:spPr>
+          <a:xfrm>
+            <a:off x="640080" y="3703320"/>
+            <a:ext cx="3474720" cy="1097280"/>
           </a:xfrm>
           <a:prstGeom prst="rect">
             <a:avLst/>
@@ -10597,139 +11412,101 @@
           <a:bodyPr wrap="square" lIns="0" tIns="0" rIns="0" bIns="0" rtlCol="0" anchor="ctr"/>
           <a:lstStyle/>
           <a:p>
-            <a:pPr marL="0" indent="0">
-              <a:buNone/>
-            </a:pPr>
-            <a:r>
-              <a:rPr lang="en-US" sz="1200" dirty="0">
+            <a:pPr marL="342900" indent="-342900">
+              <a:spcAft>
+                <a:spcPts val="300"/>
+              </a:spcAft>
+              <a:buSzPct val="100000"/>
+              <a:buChar char="•"/>
+            </a:pPr>
+            <a:r>
+              <a:rPr lang="en-US" sz="1100" dirty="0">
                 <a:solidFill>
                   <a:srgbClr val="1E293B"/>
-                </a:solidFill>
-                <a:latin typeface="Consolas" pitchFamily="34" charset="0"/>
-                <a:ea typeface="Consolas" pitchFamily="34" charset="-122"/>
-                <a:cs typeface="Consolas" pitchFamily="34" charset="-120"/>
-              </a:rPr>
-              <a:t>.claude/settings.local.json</a:t>
-            </a:r>
-            <a:endParaRPr lang="en-US" sz="1200" dirty="0"/>
-          </a:p>
-        </p:txBody>
-      </p:sp>
-      <p:sp>
-        <p:nvSpPr>
-          <p:cNvPr id="21" name="Text 19"/>
-          <p:cNvSpPr/>
-          <p:nvPr/>
-        </p:nvSpPr>
-        <p:spPr>
-          <a:xfrm>
-            <a:off x="5943600" y="2185416"/>
-            <a:ext cx="2560320" cy="475488"/>
-          </a:xfrm>
-          <a:prstGeom prst="rect">
-            <a:avLst/>
-          </a:prstGeom>
-          <a:noFill/>
-          <a:ln/>
-        </p:spPr>
-        <p:txBody>
-          <a:bodyPr wrap="square" lIns="0" tIns="0" rIns="0" bIns="0" rtlCol="0" anchor="ctr"/>
-          <a:lstStyle/>
-          <a:p>
-            <a:pPr marL="0" indent="0" algn="r">
-              <a:buNone/>
-            </a:pPr>
-            <a:r>
-              <a:rPr lang="en-US" sz="1100" i="1" dirty="0">
-                <a:solidFill>
-                  <a:srgbClr val="64748B"/>
                 </a:solidFill>
                 <a:latin typeface="Calibri" pitchFamily="34" charset="0"/>
                 <a:ea typeface="Calibri" pitchFamily="34" charset="-122"/>
                 <a:cs typeface="Calibri" pitchFamily="34" charset="-120"/>
               </a:rPr>
-              <a:t>Personal, gitignored</a:t>
+              <a:t>Shift+Tab twice (cycles: Normal &gt; Auto-Accept &gt; Plan)</a:t>
             </a:r>
             <a:endParaRPr lang="en-US" sz="1100" dirty="0"/>
           </a:p>
-        </p:txBody>
-      </p:sp>
-      <p:sp>
-        <p:nvSpPr>
-          <p:cNvPr id="22" name="Shape 20"/>
-          <p:cNvSpPr/>
-          <p:nvPr/>
-        </p:nvSpPr>
-        <p:spPr>
-          <a:xfrm>
-            <a:off x="548640" y="2798064"/>
-            <a:ext cx="411480" cy="411480"/>
-          </a:xfrm>
-          <a:prstGeom prst="ellipse">
-            <a:avLst/>
-          </a:prstGeom>
-          <a:solidFill>
-            <a:srgbClr val="10B981"/>
-          </a:solidFill>
-          <a:ln/>
-        </p:spPr>
-        <p:txBody>
-          <a:bodyPr/>
-          <a:lstStyle/>
-          <a:p>
-            <a:endParaRPr lang="en-US"/>
-          </a:p>
-        </p:txBody>
-      </p:sp>
-      <p:sp>
-        <p:nvSpPr>
-          <p:cNvPr id="23" name="Text 21"/>
-          <p:cNvSpPr/>
-          <p:nvPr/>
-        </p:nvSpPr>
-        <p:spPr>
-          <a:xfrm>
-            <a:off x="548640" y="2798064"/>
-            <a:ext cx="411480" cy="411480"/>
-          </a:xfrm>
-          <a:prstGeom prst="rect">
-            <a:avLst/>
-          </a:prstGeom>
-          <a:noFill/>
-          <a:ln/>
-        </p:spPr>
-        <p:txBody>
-          <a:bodyPr wrap="square" lIns="0" tIns="0" rIns="0" bIns="0" rtlCol="0" anchor="ctr"/>
-          <a:lstStyle/>
-          <a:p>
-            <a:pPr marL="0" indent="0" algn="ctr">
-              <a:buNone/>
-            </a:pPr>
-            <a:r>
-              <a:rPr lang="en-US" sz="1600" b="1" dirty="0">
-                <a:solidFill>
-                  <a:srgbClr val="FFFFFF"/>
-                </a:solidFill>
-                <a:latin typeface="Trebuchet MS" pitchFamily="34" charset="0"/>
-                <a:ea typeface="Trebuchet MS" pitchFamily="34" charset="-122"/>
-                <a:cs typeface="Trebuchet MS" pitchFamily="34" charset="-120"/>
-              </a:rPr>
-              <a:t>4</a:t>
-            </a:r>
-            <a:endParaRPr lang="en-US" sz="1600" dirty="0"/>
-          </a:p>
-        </p:txBody>
-      </p:sp>
-      <p:sp>
-        <p:nvSpPr>
-          <p:cNvPr id="24" name="Shape 22"/>
-          <p:cNvSpPr/>
-          <p:nvPr/>
-        </p:nvSpPr>
-        <p:spPr>
-          <a:xfrm>
-            <a:off x="1097280" y="2752344"/>
-            <a:ext cx="7498080" cy="475488"/>
+          <a:p>
+            <a:pPr marL="342900" indent="-342900">
+              <a:spcAft>
+                <a:spcPts val="300"/>
+              </a:spcAft>
+              <a:buSzPct val="100000"/>
+              <a:buChar char="•"/>
+            </a:pPr>
+            <a:r>
+              <a:rPr lang="en-US" sz="1100" dirty="0">
+                <a:solidFill>
+                  <a:srgbClr val="1E293B"/>
+                </a:solidFill>
+                <a:latin typeface="Calibri" pitchFamily="34" charset="0"/>
+                <a:ea typeface="Calibri" pitchFamily="34" charset="-122"/>
+                <a:cs typeface="Calibri" pitchFamily="34" charset="-120"/>
+              </a:rPr>
+              <a:t>/plan command</a:t>
+            </a:r>
+            <a:endParaRPr lang="en-US" sz="1100" dirty="0"/>
+          </a:p>
+          <a:p>
+            <a:pPr marL="342900" indent="-342900">
+              <a:spcAft>
+                <a:spcPts val="300"/>
+              </a:spcAft>
+              <a:buSzPct val="100000"/>
+              <a:buChar char="•"/>
+            </a:pPr>
+            <a:r>
+              <a:rPr lang="en-US" sz="1100" dirty="0">
+                <a:solidFill>
+                  <a:srgbClr val="1E293B"/>
+                </a:solidFill>
+                <a:latin typeface="Calibri" pitchFamily="34" charset="0"/>
+                <a:ea typeface="Calibri" pitchFamily="34" charset="-122"/>
+                <a:cs typeface="Calibri" pitchFamily="34" charset="-120"/>
+              </a:rPr>
+              <a:t>--permission-mode plan flag</a:t>
+            </a:r>
+            <a:endParaRPr lang="en-US" sz="1100" dirty="0"/>
+          </a:p>
+          <a:p>
+            <a:pPr marL="342900" indent="-342900">
+              <a:spcAft>
+                <a:spcPts val="300"/>
+              </a:spcAft>
+              <a:buSzPct val="100000"/>
+              <a:buChar char="•"/>
+            </a:pPr>
+            <a:r>
+              <a:rPr lang="en-US" sz="1100" dirty="0">
+                <a:solidFill>
+                  <a:srgbClr val="1E293B"/>
+                </a:solidFill>
+                <a:latin typeface="Calibri" pitchFamily="34" charset="0"/>
+                <a:ea typeface="Calibri" pitchFamily="34" charset="-122"/>
+                <a:cs typeface="Calibri" pitchFamily="34" charset="-120"/>
+              </a:rPr>
+              <a:t>Set as default: "defaultMode": "plan" in settings</a:t>
+            </a:r>
+            <a:endParaRPr lang="en-US" sz="1100" dirty="0"/>
+          </a:p>
+        </p:txBody>
+      </p:sp>
+      <p:sp>
+        <p:nvSpPr>
+          <p:cNvPr id="17" name="Shape 15"/>
+          <p:cNvSpPr/>
+          <p:nvPr/>
+        </p:nvSpPr>
+        <p:spPr>
+          <a:xfrm>
+            <a:off x="4846320" y="3246120"/>
+            <a:ext cx="3840480" cy="1691640"/>
           </a:xfrm>
           <a:prstGeom prst="rect">
             <a:avLst/>
@@ -10756,14 +11533,41 @@
       </p:sp>
       <p:sp>
         <p:nvSpPr>
-          <p:cNvPr id="25" name="Text 23"/>
-          <p:cNvSpPr/>
-          <p:nvPr/>
-        </p:nvSpPr>
-        <p:spPr>
-          <a:xfrm>
-            <a:off x="1280160" y="2752344"/>
-            <a:ext cx="1188720" cy="475488"/>
+          <p:cNvPr id="18" name="Shape 16"/>
+          <p:cNvSpPr/>
+          <p:nvPr/>
+        </p:nvSpPr>
+        <p:spPr>
+          <a:xfrm>
+            <a:off x="4846320" y="3246120"/>
+            <a:ext cx="3840480" cy="54864"/>
+          </a:xfrm>
+          <a:prstGeom prst="rect">
+            <a:avLst/>
+          </a:prstGeom>
+          <a:solidFill>
+            <a:srgbClr val="8B5CF6"/>
+          </a:solidFill>
+          <a:ln/>
+        </p:spPr>
+        <p:txBody>
+          <a:bodyPr/>
+          <a:lstStyle/>
+          <a:p>
+            <a:endParaRPr lang="en-US"/>
+          </a:p>
+        </p:txBody>
+      </p:sp>
+      <p:sp>
+        <p:nvSpPr>
+          <p:cNvPr id="19" name="Text 17"/>
+          <p:cNvSpPr/>
+          <p:nvPr/>
+        </p:nvSpPr>
+        <p:spPr>
+          <a:xfrm>
+            <a:off x="5029200" y="3383280"/>
+            <a:ext cx="3474720" cy="274320"/>
           </a:xfrm>
           <a:prstGeom prst="rect">
             <a:avLst/>
@@ -10781,13 +11585,13 @@
             <a:r>
               <a:rPr lang="en-US" sz="1400" b="1" dirty="0">
                 <a:solidFill>
-                  <a:srgbClr val="10B981"/>
+                  <a:srgbClr val="8B5CF6"/>
                 </a:solidFill>
                 <a:latin typeface="Trebuchet MS" pitchFamily="34" charset="0"/>
                 <a:ea typeface="Trebuchet MS" pitchFamily="34" charset="-122"/>
                 <a:cs typeface="Trebuchet MS" pitchFamily="34" charset="-120"/>
               </a:rPr>
-              <a:t>Project</a:t>
+              <a:t>Recommended workflow:</a:t>
             </a:r>
             <a:endParaRPr lang="en-US" sz="1400" dirty="0"/>
           </a:p>
@@ -10795,14 +11599,14 @@
       </p:sp>
       <p:sp>
         <p:nvSpPr>
-          <p:cNvPr id="26" name="Text 24"/>
-          <p:cNvSpPr/>
-          <p:nvPr/>
-        </p:nvSpPr>
-        <p:spPr>
-          <a:xfrm>
-            <a:off x="2560320" y="2752344"/>
-            <a:ext cx="3200400" cy="475488"/>
+          <p:cNvPr id="20" name="Text 18"/>
+          <p:cNvSpPr/>
+          <p:nvPr/>
+        </p:nvSpPr>
+        <p:spPr>
+          <a:xfrm>
+            <a:off x="5029200" y="3703320"/>
+            <a:ext cx="3474720" cy="1097280"/>
           </a:xfrm>
           <a:prstGeom prst="rect">
             <a:avLst/>
@@ -10815,348 +11619,53 @@
           <a:lstStyle/>
           <a:p>
             <a:pPr marL="0" indent="0">
+              <a:spcAft>
+                <a:spcPts val="300"/>
+              </a:spcAft>
               <a:buNone/>
             </a:pPr>
             <a:r>
-              <a:rPr lang="en-US" sz="1200" dirty="0">
+              <a:rPr lang="en-US" sz="1100" dirty="0">
                 <a:solidFill>
                   <a:srgbClr val="1E293B"/>
-                </a:solidFill>
-                <a:latin typeface="Consolas" pitchFamily="34" charset="0"/>
-                <a:ea typeface="Consolas" pitchFamily="34" charset="-122"/>
-                <a:cs typeface="Consolas" pitchFamily="34" charset="-120"/>
-              </a:rPr>
-              <a:t>.claude/settings.json</a:t>
-            </a:r>
-            <a:endParaRPr lang="en-US" sz="1200" dirty="0"/>
-          </a:p>
-        </p:txBody>
-      </p:sp>
-      <p:sp>
-        <p:nvSpPr>
-          <p:cNvPr id="27" name="Text 25"/>
-          <p:cNvSpPr/>
-          <p:nvPr/>
-        </p:nvSpPr>
-        <p:spPr>
-          <a:xfrm>
-            <a:off x="5943600" y="2752344"/>
-            <a:ext cx="2560320" cy="475488"/>
-          </a:xfrm>
-          <a:prstGeom prst="rect">
-            <a:avLst/>
-          </a:prstGeom>
-          <a:noFill/>
-          <a:ln/>
-        </p:spPr>
-        <p:txBody>
-          <a:bodyPr wrap="square" lIns="0" tIns="0" rIns="0" bIns="0" rtlCol="0" anchor="ctr"/>
-          <a:lstStyle/>
-          <a:p>
-            <a:pPr marL="0" indent="0" algn="r">
-              <a:buNone/>
-            </a:pPr>
-            <a:r>
-              <a:rPr lang="en-US" sz="1100" i="1" dirty="0">
-                <a:solidFill>
-                  <a:srgbClr val="64748B"/>
                 </a:solidFill>
                 <a:latin typeface="Calibri" pitchFamily="34" charset="0"/>
                 <a:ea typeface="Calibri" pitchFamily="34" charset="-122"/>
                 <a:cs typeface="Calibri" pitchFamily="34" charset="-120"/>
               </a:rPr>
-              <a:t>Shared, committed</a:t>
+              <a:t>1. Start in Plan Mode — let Claude analyze and propose</a:t>
             </a:r>
             <a:endParaRPr lang="en-US" sz="1100" dirty="0"/>
           </a:p>
-        </p:txBody>
-      </p:sp>
-      <p:sp>
-        <p:nvSpPr>
-          <p:cNvPr id="28" name="Shape 26"/>
-          <p:cNvSpPr/>
-          <p:nvPr/>
-        </p:nvSpPr>
-        <p:spPr>
-          <a:xfrm>
-            <a:off x="548640" y="3364992"/>
-            <a:ext cx="411480" cy="411480"/>
-          </a:xfrm>
-          <a:prstGeom prst="ellipse">
-            <a:avLst/>
-          </a:prstGeom>
-          <a:solidFill>
-            <a:srgbClr val="F59E0B"/>
-          </a:solidFill>
-          <a:ln/>
-        </p:spPr>
-        <p:txBody>
-          <a:bodyPr/>
-          <a:lstStyle/>
-          <a:p>
-            <a:endParaRPr lang="en-US"/>
-          </a:p>
-        </p:txBody>
-      </p:sp>
-      <p:sp>
-        <p:nvSpPr>
-          <p:cNvPr id="29" name="Text 27"/>
-          <p:cNvSpPr/>
-          <p:nvPr/>
-        </p:nvSpPr>
-        <p:spPr>
-          <a:xfrm>
-            <a:off x="548640" y="3364992"/>
-            <a:ext cx="411480" cy="411480"/>
-          </a:xfrm>
-          <a:prstGeom prst="rect">
-            <a:avLst/>
-          </a:prstGeom>
-          <a:noFill/>
-          <a:ln/>
-        </p:spPr>
-        <p:txBody>
-          <a:bodyPr wrap="square" lIns="0" tIns="0" rIns="0" bIns="0" rtlCol="0" anchor="ctr"/>
-          <a:lstStyle/>
-          <a:p>
-            <a:pPr marL="0" indent="0" algn="ctr">
+          <a:p>
+            <a:pPr marL="0" indent="0">
+              <a:spcAft>
+                <a:spcPts val="300"/>
+              </a:spcAft>
               <a:buNone/>
             </a:pPr>
             <a:r>
-              <a:rPr lang="en-US" sz="1600" b="1" dirty="0">
-                <a:solidFill>
-                  <a:srgbClr val="FFFFFF"/>
-                </a:solidFill>
-                <a:latin typeface="Trebuchet MS" pitchFamily="34" charset="0"/>
-                <a:ea typeface="Trebuchet MS" pitchFamily="34" charset="-122"/>
-                <a:cs typeface="Trebuchet MS" pitchFamily="34" charset="-120"/>
-              </a:rPr>
-              <a:t>5</a:t>
-            </a:r>
-            <a:endParaRPr lang="en-US" sz="1600" dirty="0"/>
-          </a:p>
-        </p:txBody>
-      </p:sp>
-      <p:sp>
-        <p:nvSpPr>
-          <p:cNvPr id="30" name="Shape 28"/>
-          <p:cNvSpPr/>
-          <p:nvPr/>
-        </p:nvSpPr>
-        <p:spPr>
-          <a:xfrm>
-            <a:off x="1097280" y="3319272"/>
-            <a:ext cx="7498080" cy="475488"/>
-          </a:xfrm>
-          <a:prstGeom prst="rect">
-            <a:avLst/>
-          </a:prstGeom>
-          <a:solidFill>
-            <a:srgbClr val="FFFFFF"/>
-          </a:solidFill>
-          <a:ln/>
-          <a:effectLst>
-            <a:outerShdw blurRad="101600" dist="25400" dir="8100000" algn="bl" rotWithShape="0">
-              <a:srgbClr val="000000">
-                <a:alpha val="8000"/>
-              </a:srgbClr>
-            </a:outerShdw>
-          </a:effectLst>
-        </p:spPr>
-        <p:txBody>
-          <a:bodyPr/>
-          <a:lstStyle/>
-          <a:p>
-            <a:endParaRPr lang="en-US"/>
-          </a:p>
-        </p:txBody>
-      </p:sp>
-      <p:sp>
-        <p:nvSpPr>
-          <p:cNvPr id="31" name="Text 29"/>
-          <p:cNvSpPr/>
-          <p:nvPr/>
-        </p:nvSpPr>
-        <p:spPr>
-          <a:xfrm>
-            <a:off x="1280160" y="3319272"/>
-            <a:ext cx="1188720" cy="475488"/>
-          </a:xfrm>
-          <a:prstGeom prst="rect">
-            <a:avLst/>
-          </a:prstGeom>
-          <a:noFill/>
-          <a:ln/>
-        </p:spPr>
-        <p:txBody>
-          <a:bodyPr wrap="square" lIns="0" tIns="0" rIns="0" bIns="0" rtlCol="0" anchor="ctr"/>
-          <a:lstStyle/>
-          <a:p>
-            <a:pPr marL="0" indent="0">
-              <a:buNone/>
-            </a:pPr>
-            <a:r>
-              <a:rPr lang="en-US" sz="1400" b="1" dirty="0">
-                <a:solidFill>
-                  <a:srgbClr val="F59E0B"/>
-                </a:solidFill>
-                <a:latin typeface="Trebuchet MS" pitchFamily="34" charset="0"/>
-                <a:ea typeface="Trebuchet MS" pitchFamily="34" charset="-122"/>
-                <a:cs typeface="Trebuchet MS" pitchFamily="34" charset="-120"/>
-              </a:rPr>
-              <a:t>User</a:t>
-            </a:r>
-            <a:endParaRPr lang="en-US" sz="1400" dirty="0"/>
-          </a:p>
-        </p:txBody>
-      </p:sp>
-      <p:sp>
-        <p:nvSpPr>
-          <p:cNvPr id="32" name="Text 30"/>
-          <p:cNvSpPr/>
-          <p:nvPr/>
-        </p:nvSpPr>
-        <p:spPr>
-          <a:xfrm>
-            <a:off x="2560320" y="3319272"/>
-            <a:ext cx="3200400" cy="475488"/>
-          </a:xfrm>
-          <a:prstGeom prst="rect">
-            <a:avLst/>
-          </a:prstGeom>
-          <a:noFill/>
-          <a:ln/>
-        </p:spPr>
-        <p:txBody>
-          <a:bodyPr wrap="square" lIns="0" tIns="0" rIns="0" bIns="0" rtlCol="0" anchor="ctr"/>
-          <a:lstStyle/>
-          <a:p>
-            <a:pPr marL="0" indent="0">
-              <a:buNone/>
-            </a:pPr>
-            <a:r>
-              <a:rPr lang="en-US" sz="1200" dirty="0">
+              <a:rPr lang="en-US" sz="1100" dirty="0">
                 <a:solidFill>
                   <a:srgbClr val="1E293B"/>
-                </a:solidFill>
-                <a:latin typeface="Consolas" pitchFamily="34" charset="0"/>
-                <a:ea typeface="Consolas" pitchFamily="34" charset="-122"/>
-                <a:cs typeface="Consolas" pitchFamily="34" charset="-120"/>
-              </a:rPr>
-              <a:t>~/.claude/settings.json</a:t>
-            </a:r>
-            <a:endParaRPr lang="en-US" sz="1200" dirty="0"/>
-          </a:p>
-        </p:txBody>
-      </p:sp>
-      <p:sp>
-        <p:nvSpPr>
-          <p:cNvPr id="33" name="Text 31"/>
-          <p:cNvSpPr/>
-          <p:nvPr/>
-        </p:nvSpPr>
-        <p:spPr>
-          <a:xfrm>
-            <a:off x="5943600" y="3319272"/>
-            <a:ext cx="2560320" cy="475488"/>
-          </a:xfrm>
-          <a:prstGeom prst="rect">
-            <a:avLst/>
-          </a:prstGeom>
-          <a:noFill/>
-          <a:ln/>
-        </p:spPr>
-        <p:txBody>
-          <a:bodyPr wrap="square" lIns="0" tIns="0" rIns="0" bIns="0" rtlCol="0" anchor="ctr"/>
-          <a:lstStyle/>
-          <a:p>
-            <a:pPr marL="0" indent="0" algn="r">
-              <a:buNone/>
-            </a:pPr>
-            <a:r>
-              <a:rPr lang="en-US" sz="1100" i="1" dirty="0">
-                <a:solidFill>
-                  <a:srgbClr val="64748B"/>
                 </a:solidFill>
                 <a:latin typeface="Calibri" pitchFamily="34" charset="0"/>
                 <a:ea typeface="Calibri" pitchFamily="34" charset="-122"/>
                 <a:cs typeface="Calibri" pitchFamily="34" charset="-120"/>
               </a:rPr>
-              <a:t>Personal, all projects</a:t>
+              <a:t>2. Review the plan — edit if needed</a:t>
             </a:r>
             <a:endParaRPr lang="en-US" sz="1100" dirty="0"/>
           </a:p>
-        </p:txBody>
-      </p:sp>
-      <p:sp>
-        <p:nvSpPr>
-          <p:cNvPr id="34" name="Text 32"/>
-          <p:cNvSpPr/>
-          <p:nvPr/>
-        </p:nvSpPr>
-        <p:spPr>
-          <a:xfrm>
-            <a:off x="731520" y="4023360"/>
-            <a:ext cx="7680960" cy="320040"/>
-          </a:xfrm>
-          <a:prstGeom prst="rect">
-            <a:avLst/>
-          </a:prstGeom>
-          <a:noFill/>
-          <a:ln/>
-        </p:spPr>
-        <p:txBody>
-          <a:bodyPr wrap="square" lIns="0" tIns="0" rIns="0" bIns="0" rtlCol="0" anchor="ctr"/>
-          <a:lstStyle/>
           <a:p>
             <a:pPr marL="0" indent="0">
+              <a:spcAft>
+                <a:spcPts val="300"/>
+              </a:spcAft>
               <a:buNone/>
             </a:pPr>
             <a:r>
-              <a:rPr lang="en-US" sz="1500" b="1" dirty="0">
-                <a:solidFill>
-                  <a:srgbClr val="1E293B"/>
-                </a:solidFill>
-                <a:latin typeface="Trebuchet MS" pitchFamily="34" charset="0"/>
-                <a:ea typeface="Trebuchet MS" pitchFamily="34" charset="-122"/>
-                <a:cs typeface="Trebuchet MS" pitchFamily="34" charset="-120"/>
-              </a:rPr>
-              <a:t>Key settings:</a:t>
-            </a:r>
-            <a:endParaRPr lang="en-US" sz="1500" dirty="0"/>
-          </a:p>
-        </p:txBody>
-      </p:sp>
-      <p:sp>
-        <p:nvSpPr>
-          <p:cNvPr id="35" name="Text 33"/>
-          <p:cNvSpPr/>
-          <p:nvPr/>
-        </p:nvSpPr>
-        <p:spPr>
-          <a:xfrm>
-            <a:off x="731520" y="4343400"/>
-            <a:ext cx="7680960" cy="731520"/>
-          </a:xfrm>
-          <a:prstGeom prst="rect">
-            <a:avLst/>
-          </a:prstGeom>
-          <a:noFill/>
-          <a:ln/>
-        </p:spPr>
-        <p:txBody>
-          <a:bodyPr wrap="square" lIns="0" tIns="0" rIns="0" bIns="0" rtlCol="0" anchor="ctr"/>
-          <a:lstStyle/>
-          <a:p>
-            <a:pPr marL="342900" indent="-342900">
-              <a:spcAft>
-                <a:spcPts val="400"/>
-              </a:spcAft>
-              <a:buSzPct val="100000"/>
-              <a:buChar char="•"/>
-            </a:pPr>
-            <a:r>
-              <a:rPr lang="en-US" sz="1200" dirty="0">
+              <a:rPr lang="en-US" sz="1100" dirty="0">
                 <a:solidFill>
                   <a:srgbClr val="1E293B"/>
                 </a:solidFill>
@@ -11164,20 +11673,19 @@
                 <a:ea typeface="Calibri" pitchFamily="34" charset="-122"/>
                 <a:cs typeface="Calibri" pitchFamily="34" charset="-120"/>
               </a:rPr>
-              <a:t>permissions.allow / deny — what Claude can run without asking</a:t>
-            </a:r>
-            <a:endParaRPr lang="en-US" sz="1200" dirty="0"/>
-          </a:p>
-          <a:p>
-            <a:pPr marL="342900" indent="-342900">
+              <a:t>3. Switch to Normal Mode — let Claude execute</a:t>
+            </a:r>
+            <a:endParaRPr lang="en-US" sz="1100" dirty="0"/>
+          </a:p>
+          <a:p>
+            <a:pPr marL="0" indent="0">
               <a:spcAft>
-                <a:spcPts val="400"/>
+                <a:spcPts val="300"/>
               </a:spcAft>
-              <a:buSzPct val="100000"/>
-              <a:buChar char="•"/>
-            </a:pPr>
-            <a:r>
-              <a:rPr lang="en-US" sz="1200" dirty="0">
+              <a:buNone/>
+            </a:pPr>
+            <a:r>
+              <a:rPr lang="en-US" sz="1100" dirty="0">
                 <a:solidFill>
                   <a:srgbClr val="1E293B"/>
                 </a:solidFill>
@@ -11185,517 +11693,9 @@
                 <a:ea typeface="Calibri" pitchFamily="34" charset="-122"/>
                 <a:cs typeface="Calibri" pitchFamily="34" charset="-120"/>
               </a:rPr>
-              <a:t>defaultMode — start in plan/default/acceptEdits mode</a:t>
-            </a:r>
-            <a:endParaRPr lang="en-US" sz="1200" dirty="0"/>
-          </a:p>
-          <a:p>
-            <a:pPr marL="342900" indent="-342900">
-              <a:spcAft>
-                <a:spcPts val="400"/>
-              </a:spcAft>
-              <a:buSzPct val="100000"/>
-              <a:buChar char="•"/>
-            </a:pPr>
-            <a:r>
-              <a:rPr lang="en-US" sz="1200" dirty="0">
-                <a:solidFill>
-                  <a:srgbClr val="1E293B"/>
-                </a:solidFill>
-                <a:latin typeface="Calibri" pitchFamily="34" charset="0"/>
-                <a:ea typeface="Calibri" pitchFamily="34" charset="-122"/>
-                <a:cs typeface="Calibri" pitchFamily="34" charset="-120"/>
-              </a:rPr>
-              <a:t>model — override the default model</a:t>
-            </a:r>
-            <a:endParaRPr lang="en-US" sz="1200" dirty="0"/>
-          </a:p>
-        </p:txBody>
-      </p:sp>
-    </p:spTree>
-  </p:cSld>
-  <p:clrMapOvr>
-    <a:masterClrMapping/>
-  </p:clrMapOvr>
-</p:sld>
-</file>
-
-<file path=ppt/slides/slide9.xml><?xml version="1.0" encoding="utf-8"?>
-<p:sld xmlns:a="http://schemas.openxmlformats.org/drawingml/2006/main" xmlns:r="http://schemas.openxmlformats.org/officeDocument/2006/relationships" xmlns:p="http://schemas.openxmlformats.org/presentationml/2006/main">
-  <p:cSld name="Slide 9">
-    <p:bg>
-      <p:bgPr>
-        <a:solidFill>
-          <a:srgbClr val="F8FAFC"/>
-        </a:solidFill>
-        <a:effectLst/>
-      </p:bgPr>
-    </p:bg>
-    <p:spTree>
-      <p:nvGrpSpPr>
-        <p:cNvPr id="1" name=""/>
-        <p:cNvGrpSpPr/>
-        <p:nvPr/>
-      </p:nvGrpSpPr>
-      <p:grpSpPr>
-        <a:xfrm>
-          <a:off x="0" y="0"/>
-          <a:ext cx="0" cy="0"/>
-          <a:chOff x="0" y="0"/>
-          <a:chExt cx="0" cy="0"/>
-        </a:xfrm>
-      </p:grpSpPr>
-      <p:sp>
-        <p:nvSpPr>
-          <p:cNvPr id="2" name="Shape 0"/>
-          <p:cNvSpPr/>
-          <p:nvPr/>
-        </p:nvSpPr>
-        <p:spPr>
-          <a:xfrm>
-            <a:off x="0" y="0"/>
-            <a:ext cx="9144000" cy="822960"/>
-          </a:xfrm>
-          <a:prstGeom prst="rect">
-            <a:avLst/>
-          </a:prstGeom>
-          <a:solidFill>
-            <a:srgbClr val="0F172A"/>
-          </a:solidFill>
-          <a:ln/>
-        </p:spPr>
-        <p:txBody>
-          <a:bodyPr/>
-          <a:lstStyle/>
-          <a:p>
-            <a:endParaRPr lang="en-US"/>
-          </a:p>
-        </p:txBody>
-      </p:sp>
-      <p:sp>
-        <p:nvSpPr>
-          <p:cNvPr id="3" name="Text 1"/>
-          <p:cNvSpPr/>
-          <p:nvPr/>
-        </p:nvSpPr>
-        <p:spPr>
-          <a:xfrm>
-            <a:off x="731520" y="91440"/>
-            <a:ext cx="7680960" cy="640080"/>
-          </a:xfrm>
-          <a:prstGeom prst="rect">
-            <a:avLst/>
-          </a:prstGeom>
-          <a:noFill/>
-          <a:ln/>
-        </p:spPr>
-        <p:txBody>
-          <a:bodyPr wrap="square" lIns="0" tIns="0" rIns="0" bIns="0" rtlCol="0" anchor="ctr"/>
-          <a:lstStyle/>
-          <a:p>
-            <a:pPr marL="0" indent="0">
-              <a:buNone/>
-            </a:pPr>
-            <a:r>
-              <a:rPr lang="en-US" sz="2800" b="1" dirty="0">
-                <a:solidFill>
-                  <a:srgbClr val="FFFFFF"/>
-                </a:solidFill>
-                <a:latin typeface="Trebuchet MS" pitchFamily="34" charset="0"/>
-                <a:ea typeface="Trebuchet MS" pitchFamily="34" charset="-122"/>
-                <a:cs typeface="Trebuchet MS" pitchFamily="34" charset="-120"/>
-              </a:rPr>
-              <a:t>Research Mode</a:t>
-            </a:r>
-            <a:endParaRPr lang="en-US" sz="2800" dirty="0"/>
-          </a:p>
-        </p:txBody>
-      </p:sp>
-      <p:sp>
-        <p:nvSpPr>
-          <p:cNvPr id="4" name="Text 2"/>
-          <p:cNvSpPr/>
-          <p:nvPr/>
-        </p:nvSpPr>
-        <p:spPr>
-          <a:xfrm>
-            <a:off x="731520" y="1005840"/>
-            <a:ext cx="7680960" cy="365760"/>
-          </a:xfrm>
-          <a:prstGeom prst="rect">
-            <a:avLst/>
-          </a:prstGeom>
-          <a:noFill/>
-          <a:ln/>
-        </p:spPr>
-        <p:txBody>
-          <a:bodyPr wrap="square" lIns="0" tIns="0" rIns="0" bIns="0" rtlCol="0" anchor="ctr"/>
-          <a:lstStyle/>
-          <a:p>
-            <a:pPr marL="0" indent="0">
-              <a:buNone/>
-            </a:pPr>
-            <a:r>
-              <a:rPr lang="en-US" sz="1400" i="1" dirty="0">
-                <a:solidFill>
-                  <a:srgbClr val="64748B"/>
-                </a:solidFill>
-                <a:latin typeface="Calibri" pitchFamily="34" charset="0"/>
-                <a:ea typeface="Calibri" pitchFamily="34" charset="-122"/>
-                <a:cs typeface="Calibri" pitchFamily="34" charset="-120"/>
-              </a:rPr>
-              <a:t>Available in Claude Chat (web) — tells Claude to search the web before answering, then cite sources.</a:t>
-            </a:r>
-            <a:endParaRPr lang="en-US" sz="1400" dirty="0"/>
-          </a:p>
-        </p:txBody>
-      </p:sp>
-      <p:sp>
-        <p:nvSpPr>
-          <p:cNvPr id="5" name="Shape 3"/>
-          <p:cNvSpPr/>
-          <p:nvPr/>
-        </p:nvSpPr>
-        <p:spPr>
-          <a:xfrm>
-            <a:off x="457200" y="1554480"/>
-            <a:ext cx="3840480" cy="2377440"/>
-          </a:xfrm>
-          <a:prstGeom prst="rect">
-            <a:avLst/>
-          </a:prstGeom>
-          <a:solidFill>
-            <a:srgbClr val="FFFFFF"/>
-          </a:solidFill>
-          <a:ln/>
-          <a:effectLst>
-            <a:outerShdw blurRad="101600" dist="25400" dir="8100000" algn="bl" rotWithShape="0">
-              <a:srgbClr val="000000">
-                <a:alpha val="8000"/>
-              </a:srgbClr>
-            </a:outerShdw>
-          </a:effectLst>
-        </p:spPr>
-        <p:txBody>
-          <a:bodyPr/>
-          <a:lstStyle/>
-          <a:p>
-            <a:endParaRPr lang="en-US"/>
-          </a:p>
-        </p:txBody>
-      </p:sp>
-      <p:sp>
-        <p:nvSpPr>
-          <p:cNvPr id="6" name="Shape 4"/>
-          <p:cNvSpPr/>
-          <p:nvPr/>
-        </p:nvSpPr>
-        <p:spPr>
-          <a:xfrm>
-            <a:off x="457200" y="1554480"/>
-            <a:ext cx="3840480" cy="54864"/>
-          </a:xfrm>
-          <a:prstGeom prst="rect">
-            <a:avLst/>
-          </a:prstGeom>
-          <a:solidFill>
-            <a:srgbClr val="10B981"/>
-          </a:solidFill>
-          <a:ln/>
-        </p:spPr>
-        <p:txBody>
-          <a:bodyPr/>
-          <a:lstStyle/>
-          <a:p>
-            <a:endParaRPr lang="en-US"/>
-          </a:p>
-        </p:txBody>
-      </p:sp>
-      <p:sp>
-        <p:nvSpPr>
-          <p:cNvPr id="7" name="Text 5"/>
-          <p:cNvSpPr/>
-          <p:nvPr/>
-        </p:nvSpPr>
-        <p:spPr>
-          <a:xfrm>
-            <a:off x="640080" y="1737360"/>
-            <a:ext cx="3474720" cy="320040"/>
-          </a:xfrm>
-          <a:prstGeom prst="rect">
-            <a:avLst/>
-          </a:prstGeom>
-          <a:noFill/>
-          <a:ln/>
-        </p:spPr>
-        <p:txBody>
-          <a:bodyPr wrap="square" lIns="0" tIns="0" rIns="0" bIns="0" rtlCol="0" anchor="ctr"/>
-          <a:lstStyle/>
-          <a:p>
-            <a:pPr marL="0" indent="0">
-              <a:buNone/>
-            </a:pPr>
-            <a:r>
-              <a:rPr lang="en-US" sz="1500" b="1" dirty="0">
-                <a:solidFill>
-                  <a:srgbClr val="10B981"/>
-                </a:solidFill>
-                <a:latin typeface="Trebuchet MS" pitchFamily="34" charset="0"/>
-                <a:ea typeface="Trebuchet MS" pitchFamily="34" charset="-122"/>
-                <a:cs typeface="Trebuchet MS" pitchFamily="34" charset="-120"/>
-              </a:rPr>
-              <a:t>When to use it:</a:t>
-            </a:r>
-            <a:endParaRPr lang="en-US" sz="1500" dirty="0"/>
-          </a:p>
-        </p:txBody>
-      </p:sp>
-      <p:sp>
-        <p:nvSpPr>
-          <p:cNvPr id="8" name="Text 6"/>
-          <p:cNvSpPr/>
-          <p:nvPr/>
-        </p:nvSpPr>
-        <p:spPr>
-          <a:xfrm>
-            <a:off x="640080" y="2103120"/>
-            <a:ext cx="3474720" cy="1645920"/>
-          </a:xfrm>
-          <a:prstGeom prst="rect">
-            <a:avLst/>
-          </a:prstGeom>
-          <a:noFill/>
-          <a:ln/>
-        </p:spPr>
-        <p:txBody>
-          <a:bodyPr wrap="square" lIns="0" tIns="0" rIns="0" bIns="0" rtlCol="0" anchor="ctr"/>
-          <a:lstStyle/>
-          <a:p>
-            <a:pPr marL="342900" indent="-342900">
-              <a:spcAft>
-                <a:spcPts val="800"/>
-              </a:spcAft>
-              <a:buSzPct val="100000"/>
-              <a:buChar char="•"/>
-            </a:pPr>
-            <a:r>
-              <a:rPr lang="en-US" sz="1200" dirty="0">
-                <a:solidFill>
-                  <a:srgbClr val="1E293B"/>
-                </a:solidFill>
-                <a:latin typeface="Calibri" pitchFamily="34" charset="0"/>
-                <a:ea typeface="Calibri" pitchFamily="34" charset="-122"/>
-                <a:cs typeface="Calibri" pitchFamily="34" charset="-120"/>
-              </a:rPr>
-              <a:t>Evaluating a new library (e.g., "Django Ninja vs DRF?")</a:t>
-            </a:r>
-            <a:endParaRPr lang="en-US" sz="1200" dirty="0"/>
-          </a:p>
-          <a:p>
-            <a:pPr marL="342900" indent="-342900">
-              <a:spcAft>
-                <a:spcPts val="800"/>
-              </a:spcAft>
-              <a:buSzPct val="100000"/>
-              <a:buChar char="•"/>
-            </a:pPr>
-            <a:r>
-              <a:rPr lang="en-US" sz="1200" dirty="0">
-                <a:solidFill>
-                  <a:srgbClr val="1E293B"/>
-                </a:solidFill>
-                <a:latin typeface="Calibri" pitchFamily="34" charset="0"/>
-                <a:ea typeface="Calibri" pitchFamily="34" charset="-122"/>
-                <a:cs typeface="Calibri" pitchFamily="34" charset="-120"/>
-              </a:rPr>
-              <a:t>Checking for recent breaking changes in a dependency</a:t>
-            </a:r>
-            <a:endParaRPr lang="en-US" sz="1200" dirty="0"/>
-          </a:p>
-          <a:p>
-            <a:pPr marL="342900" indent="-342900">
-              <a:spcAft>
-                <a:spcPts val="800"/>
-              </a:spcAft>
-              <a:buSzPct val="100000"/>
-              <a:buChar char="•"/>
-            </a:pPr>
-            <a:r>
-              <a:rPr lang="en-US" sz="1200" dirty="0">
-                <a:solidFill>
-                  <a:srgbClr val="1E293B"/>
-                </a:solidFill>
-                <a:latin typeface="Calibri" pitchFamily="34" charset="0"/>
-                <a:ea typeface="Calibri" pitchFamily="34" charset="-122"/>
-                <a:cs typeface="Calibri" pitchFamily="34" charset="-120"/>
-              </a:rPr>
-              <a:t>Finding current best practices for a technology</a:t>
-            </a:r>
-            <a:endParaRPr lang="en-US" sz="1200" dirty="0"/>
-          </a:p>
-        </p:txBody>
-      </p:sp>
-      <p:sp>
-        <p:nvSpPr>
-          <p:cNvPr id="9" name="Shape 7"/>
-          <p:cNvSpPr/>
-          <p:nvPr/>
-        </p:nvSpPr>
-        <p:spPr>
-          <a:xfrm>
-            <a:off x="4846320" y="1554480"/>
-            <a:ext cx="3840480" cy="2377440"/>
-          </a:xfrm>
-          <a:prstGeom prst="rect">
-            <a:avLst/>
-          </a:prstGeom>
-          <a:solidFill>
-            <a:srgbClr val="FFFFFF"/>
-          </a:solidFill>
-          <a:ln/>
-          <a:effectLst>
-            <a:outerShdw blurRad="101600" dist="25400" dir="8100000" algn="bl" rotWithShape="0">
-              <a:srgbClr val="000000">
-                <a:alpha val="8000"/>
-              </a:srgbClr>
-            </a:outerShdw>
-          </a:effectLst>
-        </p:spPr>
-        <p:txBody>
-          <a:bodyPr/>
-          <a:lstStyle/>
-          <a:p>
-            <a:endParaRPr lang="en-US"/>
-          </a:p>
-        </p:txBody>
-      </p:sp>
-      <p:sp>
-        <p:nvSpPr>
-          <p:cNvPr id="10" name="Shape 8"/>
-          <p:cNvSpPr/>
-          <p:nvPr/>
-        </p:nvSpPr>
-        <p:spPr>
-          <a:xfrm>
-            <a:off x="4846320" y="1554480"/>
-            <a:ext cx="3840480" cy="54864"/>
-          </a:xfrm>
-          <a:prstGeom prst="rect">
-            <a:avLst/>
-          </a:prstGeom>
-          <a:solidFill>
-            <a:srgbClr val="EF4444"/>
-          </a:solidFill>
-          <a:ln/>
-        </p:spPr>
-        <p:txBody>
-          <a:bodyPr/>
-          <a:lstStyle/>
-          <a:p>
-            <a:endParaRPr lang="en-US"/>
-          </a:p>
-        </p:txBody>
-      </p:sp>
-      <p:sp>
-        <p:nvSpPr>
-          <p:cNvPr id="11" name="Text 9"/>
-          <p:cNvSpPr/>
-          <p:nvPr/>
-        </p:nvSpPr>
-        <p:spPr>
-          <a:xfrm>
-            <a:off x="5029200" y="1737360"/>
-            <a:ext cx="3474720" cy="320040"/>
-          </a:xfrm>
-          <a:prstGeom prst="rect">
-            <a:avLst/>
-          </a:prstGeom>
-          <a:noFill/>
-          <a:ln/>
-        </p:spPr>
-        <p:txBody>
-          <a:bodyPr wrap="square" lIns="0" tIns="0" rIns="0" bIns="0" rtlCol="0" anchor="ctr"/>
-          <a:lstStyle/>
-          <a:p>
-            <a:pPr marL="0" indent="0">
-              <a:buNone/>
-            </a:pPr>
-            <a:r>
-              <a:rPr lang="en-US" sz="1500" b="1" dirty="0">
-                <a:solidFill>
-                  <a:srgbClr val="EF4444"/>
-                </a:solidFill>
-                <a:latin typeface="Trebuchet MS" pitchFamily="34" charset="0"/>
-                <a:ea typeface="Trebuchet MS" pitchFamily="34" charset="-122"/>
-                <a:cs typeface="Trebuchet MS" pitchFamily="34" charset="-120"/>
-              </a:rPr>
-              <a:t>When NOT to use it:</a:t>
-            </a:r>
-            <a:endParaRPr lang="en-US" sz="1500" dirty="0"/>
-          </a:p>
-        </p:txBody>
-      </p:sp>
-      <p:sp>
-        <p:nvSpPr>
-          <p:cNvPr id="12" name="Text 10"/>
-          <p:cNvSpPr/>
-          <p:nvPr/>
-        </p:nvSpPr>
-        <p:spPr>
-          <a:xfrm>
-            <a:off x="5029200" y="2103120"/>
-            <a:ext cx="3474720" cy="1645920"/>
-          </a:xfrm>
-          <a:prstGeom prst="rect">
-            <a:avLst/>
-          </a:prstGeom>
-          <a:noFill/>
-          <a:ln/>
-        </p:spPr>
-        <p:txBody>
-          <a:bodyPr wrap="square" lIns="0" tIns="0" rIns="0" bIns="0" rtlCol="0" anchor="ctr"/>
-          <a:lstStyle/>
-          <a:p>
-            <a:pPr marL="342900" indent="-342900">
-              <a:spcAft>
-                <a:spcPts val="800"/>
-              </a:spcAft>
-              <a:buSzPct val="100000"/>
-              <a:buChar char="•"/>
-            </a:pPr>
-            <a:r>
-              <a:rPr lang="en-US" sz="1200" dirty="0">
-                <a:solidFill>
-                  <a:srgbClr val="1E293B"/>
-                </a:solidFill>
-                <a:latin typeface="Calibri" pitchFamily="34" charset="0"/>
-                <a:ea typeface="Calibri" pitchFamily="34" charset="-122"/>
-                <a:cs typeface="Calibri" pitchFamily="34" charset="-120"/>
-              </a:rPr>
-              <a:t>Questions about your own codebase (Claude Chat can't see it)</a:t>
-            </a:r>
-            <a:endParaRPr lang="en-US" sz="1200" dirty="0"/>
-          </a:p>
-          <a:p>
-            <a:pPr marL="342900" indent="-342900">
-              <a:spcAft>
-                <a:spcPts val="800"/>
-              </a:spcAft>
-              <a:buSzPct val="100000"/>
-              <a:buChar char="•"/>
-            </a:pPr>
-            <a:r>
-              <a:rPr lang="en-US" sz="1200" dirty="0">
-                <a:solidFill>
-                  <a:srgbClr val="1E293B"/>
-                </a:solidFill>
-                <a:latin typeface="Calibri" pitchFamily="34" charset="0"/>
-                <a:ea typeface="Calibri" pitchFamily="34" charset="-122"/>
-                <a:cs typeface="Calibri" pitchFamily="34" charset="-120"/>
-              </a:rPr>
-              <a:t>Simple coding tasks (it adds latency)</a:t>
-            </a:r>
-            <a:endParaRPr lang="en-US" sz="1200" dirty="0"/>
+              <a:t>4. Verify — run tests, review diffs</a:t>
+            </a:r>
+            <a:endParaRPr lang="en-US" sz="1100" dirty="0"/>
           </a:p>
         </p:txBody>
       </p:sp>
